--- a/Views/Autres/schema.pptx
+++ b/Views/Autres/schema.pptx
@@ -6,9 +6,10 @@
   </p:sldMasterIdLst>
   <p:sldIdLst>
     <p:sldId id="256" r:id="rId2"/>
-    <p:sldId id="258" r:id="rId3"/>
-    <p:sldId id="259" r:id="rId4"/>
-    <p:sldId id="257" r:id="rId5"/>
+    <p:sldId id="260" r:id="rId3"/>
+    <p:sldId id="258" r:id="rId4"/>
+    <p:sldId id="259" r:id="rId5"/>
+    <p:sldId id="257" r:id="rId6"/>
   </p:sldIdLst>
   <p:sldSz cx="12192000" cy="6858000"/>
   <p:notesSz cx="6858000" cy="9144000"/>
@@ -264,7 +265,7 @@
           <a:p>
             <a:fld id="{ABF21FBF-104B-42A2-A428-D4B0ACD1525D}" type="datetimeFigureOut">
               <a:rPr lang="fr-FR" smtClean="0"/>
-              <a:t>09/03/2026</a:t>
+              <a:t>17/05/2026</a:t>
             </a:fld>
             <a:endParaRPr lang="fr-FR"/>
           </a:p>
@@ -464,7 +465,7 @@
           <a:p>
             <a:fld id="{ABF21FBF-104B-42A2-A428-D4B0ACD1525D}" type="datetimeFigureOut">
               <a:rPr lang="fr-FR" smtClean="0"/>
-              <a:t>09/03/2026</a:t>
+              <a:t>17/05/2026</a:t>
             </a:fld>
             <a:endParaRPr lang="fr-FR"/>
           </a:p>
@@ -674,7 +675,7 @@
           <a:p>
             <a:fld id="{ABF21FBF-104B-42A2-A428-D4B0ACD1525D}" type="datetimeFigureOut">
               <a:rPr lang="fr-FR" smtClean="0"/>
-              <a:t>09/03/2026</a:t>
+              <a:t>17/05/2026</a:t>
             </a:fld>
             <a:endParaRPr lang="fr-FR"/>
           </a:p>
@@ -874,7 +875,7 @@
           <a:p>
             <a:fld id="{ABF21FBF-104B-42A2-A428-D4B0ACD1525D}" type="datetimeFigureOut">
               <a:rPr lang="fr-FR" smtClean="0"/>
-              <a:t>09/03/2026</a:t>
+              <a:t>17/05/2026</a:t>
             </a:fld>
             <a:endParaRPr lang="fr-FR"/>
           </a:p>
@@ -1150,7 +1151,7 @@
           <a:p>
             <a:fld id="{ABF21FBF-104B-42A2-A428-D4B0ACD1525D}" type="datetimeFigureOut">
               <a:rPr lang="fr-FR" smtClean="0"/>
-              <a:t>09/03/2026</a:t>
+              <a:t>17/05/2026</a:t>
             </a:fld>
             <a:endParaRPr lang="fr-FR"/>
           </a:p>
@@ -1418,7 +1419,7 @@
           <a:p>
             <a:fld id="{ABF21FBF-104B-42A2-A428-D4B0ACD1525D}" type="datetimeFigureOut">
               <a:rPr lang="fr-FR" smtClean="0"/>
-              <a:t>09/03/2026</a:t>
+              <a:t>17/05/2026</a:t>
             </a:fld>
             <a:endParaRPr lang="fr-FR"/>
           </a:p>
@@ -1833,7 +1834,7 @@
           <a:p>
             <a:fld id="{ABF21FBF-104B-42A2-A428-D4B0ACD1525D}" type="datetimeFigureOut">
               <a:rPr lang="fr-FR" smtClean="0"/>
-              <a:t>09/03/2026</a:t>
+              <a:t>17/05/2026</a:t>
             </a:fld>
             <a:endParaRPr lang="fr-FR"/>
           </a:p>
@@ -1975,7 +1976,7 @@
           <a:p>
             <a:fld id="{ABF21FBF-104B-42A2-A428-D4B0ACD1525D}" type="datetimeFigureOut">
               <a:rPr lang="fr-FR" smtClean="0"/>
-              <a:t>09/03/2026</a:t>
+              <a:t>17/05/2026</a:t>
             </a:fld>
             <a:endParaRPr lang="fr-FR"/>
           </a:p>
@@ -2088,7 +2089,7 @@
           <a:p>
             <a:fld id="{ABF21FBF-104B-42A2-A428-D4B0ACD1525D}" type="datetimeFigureOut">
               <a:rPr lang="fr-FR" smtClean="0"/>
-              <a:t>09/03/2026</a:t>
+              <a:t>17/05/2026</a:t>
             </a:fld>
             <a:endParaRPr lang="fr-FR"/>
           </a:p>
@@ -2401,7 +2402,7 @@
           <a:p>
             <a:fld id="{ABF21FBF-104B-42A2-A428-D4B0ACD1525D}" type="datetimeFigureOut">
               <a:rPr lang="fr-FR" smtClean="0"/>
-              <a:t>09/03/2026</a:t>
+              <a:t>17/05/2026</a:t>
             </a:fld>
             <a:endParaRPr lang="fr-FR"/>
           </a:p>
@@ -2690,7 +2691,7 @@
           <a:p>
             <a:fld id="{ABF21FBF-104B-42A2-A428-D4B0ACD1525D}" type="datetimeFigureOut">
               <a:rPr lang="fr-FR" smtClean="0"/>
-              <a:t>09/03/2026</a:t>
+              <a:t>17/05/2026</a:t>
             </a:fld>
             <a:endParaRPr lang="fr-FR"/>
           </a:p>
@@ -2933,7 +2934,7 @@
           <a:p>
             <a:fld id="{ABF21FBF-104B-42A2-A428-D4B0ACD1525D}" type="datetimeFigureOut">
               <a:rPr lang="fr-FR" smtClean="0"/>
-              <a:t>09/03/2026</a:t>
+              <a:t>17/05/2026</a:t>
             </a:fld>
             <a:endParaRPr lang="fr-FR"/>
           </a:p>
@@ -5374,6 +5375,1553 @@
         <p:cNvPr id="1" name="">
           <a:extLst>
             <a:ext uri="{FF2B5EF4-FFF2-40B4-BE49-F238E27FC236}">
+              <a16:creationId xmlns:a16="http://schemas.microsoft.com/office/drawing/2014/main" id="{3B5A8CDF-2121-5FAF-4624-36888F5288F9}"/>
+            </a:ext>
+          </a:extLst>
+        </p:cNvPr>
+        <p:cNvGrpSpPr/>
+        <p:nvPr/>
+      </p:nvGrpSpPr>
+      <p:grpSpPr>
+        <a:xfrm>
+          <a:off x="0" y="0"/>
+          <a:ext cx="0" cy="0"/>
+          <a:chOff x="0" y="0"/>
+          <a:chExt cx="0" cy="0"/>
+        </a:xfrm>
+      </p:grpSpPr>
+      <p:grpSp>
+        <p:nvGrpSpPr>
+          <p:cNvPr id="9" name="Group 8">
+            <a:extLst>
+              <a:ext uri="{FF2B5EF4-FFF2-40B4-BE49-F238E27FC236}">
+                <a16:creationId xmlns:a16="http://schemas.microsoft.com/office/drawing/2014/main" id="{81F2C6E9-AF5B-B752-330E-3B8415AF3557}"/>
+              </a:ext>
+            </a:extLst>
+          </p:cNvPr>
+          <p:cNvGrpSpPr/>
+          <p:nvPr/>
+        </p:nvGrpSpPr>
+        <p:grpSpPr>
+          <a:xfrm>
+            <a:off x="1894586" y="1986810"/>
+            <a:ext cx="9161859" cy="2899833"/>
+            <a:chOff x="1894586" y="1986810"/>
+            <a:chExt cx="9161859" cy="2899833"/>
+          </a:xfrm>
+        </p:grpSpPr>
+        <p:cxnSp>
+          <p:nvCxnSpPr>
+            <p:cNvPr id="5" name="Straight Arrow Connector 4">
+              <a:extLst>
+                <a:ext uri="{FF2B5EF4-FFF2-40B4-BE49-F238E27FC236}">
+                  <a16:creationId xmlns:a16="http://schemas.microsoft.com/office/drawing/2014/main" id="{82E36A6E-B17E-A6A8-4AFE-47FD63423977}"/>
+                </a:ext>
+              </a:extLst>
+            </p:cNvPr>
+            <p:cNvCxnSpPr>
+              <a:cxnSpLocks/>
+            </p:cNvCxnSpPr>
+            <p:nvPr/>
+          </p:nvCxnSpPr>
+          <p:spPr>
+            <a:xfrm>
+              <a:off x="2130549" y="3495794"/>
+              <a:ext cx="8804068" cy="0"/>
+            </a:xfrm>
+            <a:prstGeom prst="straightConnector1">
+              <a:avLst/>
+            </a:prstGeom>
+            <a:ln w="19050">
+              <a:solidFill>
+                <a:schemeClr val="accent1"/>
+              </a:solidFill>
+              <a:prstDash val="lgDashDotDot"/>
+              <a:tailEnd type="triangle"/>
+            </a:ln>
+          </p:spPr>
+          <p:style>
+            <a:lnRef idx="1">
+              <a:schemeClr val="accent1"/>
+            </a:lnRef>
+            <a:fillRef idx="0">
+              <a:schemeClr val="accent1"/>
+            </a:fillRef>
+            <a:effectRef idx="0">
+              <a:schemeClr val="accent1"/>
+            </a:effectRef>
+            <a:fontRef idx="minor">
+              <a:schemeClr val="tx1"/>
+            </a:fontRef>
+          </p:style>
+        </p:cxnSp>
+        <p:cxnSp>
+          <p:nvCxnSpPr>
+            <p:cNvPr id="6" name="Straight Arrow Connector 5">
+              <a:extLst>
+                <a:ext uri="{FF2B5EF4-FFF2-40B4-BE49-F238E27FC236}">
+                  <a16:creationId xmlns:a16="http://schemas.microsoft.com/office/drawing/2014/main" id="{885CA82D-2DAF-1229-F019-E7011F8CAD6D}"/>
+                </a:ext>
+              </a:extLst>
+            </p:cNvPr>
+            <p:cNvCxnSpPr>
+              <a:cxnSpLocks/>
+            </p:cNvCxnSpPr>
+            <p:nvPr/>
+          </p:nvCxnSpPr>
+          <p:spPr>
+            <a:xfrm flipV="1">
+              <a:off x="2137019" y="2144983"/>
+              <a:ext cx="1" cy="1379213"/>
+            </a:xfrm>
+            <a:prstGeom prst="straightConnector1">
+              <a:avLst/>
+            </a:prstGeom>
+            <a:ln w="19050">
+              <a:solidFill>
+                <a:schemeClr val="accent1"/>
+              </a:solidFill>
+              <a:prstDash val="lgDashDotDot"/>
+              <a:tailEnd type="triangle"/>
+            </a:ln>
+          </p:spPr>
+          <p:style>
+            <a:lnRef idx="1">
+              <a:schemeClr val="accent1"/>
+            </a:lnRef>
+            <a:fillRef idx="0">
+              <a:schemeClr val="accent1"/>
+            </a:fillRef>
+            <a:effectRef idx="0">
+              <a:schemeClr val="accent1"/>
+            </a:effectRef>
+            <a:fontRef idx="minor">
+              <a:schemeClr val="tx1"/>
+            </a:fontRef>
+          </p:style>
+        </p:cxnSp>
+        <mc:AlternateContent xmlns:mc="http://schemas.openxmlformats.org/markup-compatibility/2006">
+          <mc:Choice xmlns:a14="http://schemas.microsoft.com/office/drawing/2010/main" Requires="a14">
+            <p:sp>
+              <p:nvSpPr>
+                <p:cNvPr id="11" name="TextBox 10">
+                  <a:extLst>
+                    <a:ext uri="{FF2B5EF4-FFF2-40B4-BE49-F238E27FC236}">
+                      <a16:creationId xmlns:a16="http://schemas.microsoft.com/office/drawing/2014/main" id="{B6E901C5-8DED-61B4-F490-53A42FC9B0A6}"/>
+                    </a:ext>
+                  </a:extLst>
+                </p:cNvPr>
+                <p:cNvSpPr txBox="1"/>
+                <p:nvPr/>
+              </p:nvSpPr>
+              <p:spPr>
+                <a:xfrm>
+                  <a:off x="1894586" y="1986810"/>
+                  <a:ext cx="169084" cy="276999"/>
+                </a:xfrm>
+                <a:prstGeom prst="rect">
+                  <a:avLst/>
+                </a:prstGeom>
+                <a:noFill/>
+              </p:spPr>
+              <p:txBody>
+                <a:bodyPr wrap="none" lIns="0" tIns="0" rIns="0" bIns="0" rtlCol="0">
+                  <a:spAutoFit/>
+                </a:bodyPr>
+                <a:lstStyle/>
+                <a:p>
+                  <a:pPr/>
+                  <a14:m>
+                    <m:oMathPara xmlns:m="http://schemas.openxmlformats.org/officeDocument/2006/math">
+                      <m:oMathParaPr>
+                        <m:jc m:val="centerGroup"/>
+                      </m:oMathParaPr>
+                      <m:oMath xmlns:m="http://schemas.openxmlformats.org/officeDocument/2006/math">
+                        <m:r>
+                          <a:rPr lang="fr-FR" b="0" i="1" smtClean="0">
+                            <a:solidFill>
+                              <a:schemeClr val="accent1"/>
+                            </a:solidFill>
+                            <a:latin typeface="Cambria Math" panose="02040503050406030204" pitchFamily="18" charset="0"/>
+                          </a:rPr>
+                          <m:t>𝑧</m:t>
+                        </m:r>
+                      </m:oMath>
+                    </m:oMathPara>
+                  </a14:m>
+                  <a:endParaRPr lang="fr-FR" dirty="0">
+                    <a:solidFill>
+                      <a:schemeClr val="accent1"/>
+                    </a:solidFill>
+                  </a:endParaRPr>
+                </a:p>
+              </p:txBody>
+            </p:sp>
+          </mc:Choice>
+          <mc:Fallback>
+            <p:sp>
+              <p:nvSpPr>
+                <p:cNvPr id="11" name="TextBox 10">
+                  <a:extLst>
+                    <a:ext uri="{FF2B5EF4-FFF2-40B4-BE49-F238E27FC236}">
+                      <a16:creationId xmlns:a16="http://schemas.microsoft.com/office/drawing/2014/main" id="{B6E901C5-8DED-61B4-F490-53A42FC9B0A6}"/>
+                    </a:ext>
+                  </a:extLst>
+                </p:cNvPr>
+                <p:cNvSpPr txBox="1">
+                  <a:spLocks noRot="1" noChangeAspect="1" noMove="1" noResize="1" noEditPoints="1" noAdjustHandles="1" noChangeArrowheads="1" noChangeShapeType="1" noTextEdit="1"/>
+                </p:cNvSpPr>
+                <p:nvPr/>
+              </p:nvSpPr>
+              <p:spPr>
+                <a:xfrm>
+                  <a:off x="1894586" y="1986810"/>
+                  <a:ext cx="169084" cy="276999"/>
+                </a:xfrm>
+                <a:prstGeom prst="rect">
+                  <a:avLst/>
+                </a:prstGeom>
+                <a:blipFill>
+                  <a:blip r:embed="rId2"/>
+                  <a:stretch>
+                    <a:fillRect l="-21429" r="-14286"/>
+                  </a:stretch>
+                </a:blipFill>
+              </p:spPr>
+              <p:txBody>
+                <a:bodyPr/>
+                <a:lstStyle/>
+                <a:p>
+                  <a:r>
+                    <a:rPr lang="fr-FR">
+                      <a:noFill/>
+                    </a:rPr>
+                    <a:t> </a:t>
+                  </a:r>
+                </a:p>
+              </p:txBody>
+            </p:sp>
+          </mc:Fallback>
+        </mc:AlternateContent>
+        <mc:AlternateContent xmlns:mc="http://schemas.openxmlformats.org/markup-compatibility/2006">
+          <mc:Choice xmlns:a14="http://schemas.microsoft.com/office/drawing/2010/main" Requires="a14">
+            <p:sp>
+              <p:nvSpPr>
+                <p:cNvPr id="12" name="TextBox 11">
+                  <a:extLst>
+                    <a:ext uri="{FF2B5EF4-FFF2-40B4-BE49-F238E27FC236}">
+                      <a16:creationId xmlns:a16="http://schemas.microsoft.com/office/drawing/2014/main" id="{EFA0049A-57C3-FCED-92D3-9393A95E822D}"/>
+                    </a:ext>
+                  </a:extLst>
+                </p:cNvPr>
+                <p:cNvSpPr txBox="1"/>
+                <p:nvPr/>
+              </p:nvSpPr>
+              <p:spPr>
+                <a:xfrm>
+                  <a:off x="10873125" y="3182856"/>
+                  <a:ext cx="183320" cy="276999"/>
+                </a:xfrm>
+                <a:prstGeom prst="rect">
+                  <a:avLst/>
+                </a:prstGeom>
+                <a:noFill/>
+              </p:spPr>
+              <p:txBody>
+                <a:bodyPr wrap="none" lIns="0" tIns="0" rIns="0" bIns="0" rtlCol="0">
+                  <a:spAutoFit/>
+                </a:bodyPr>
+                <a:lstStyle/>
+                <a:p>
+                  <a:pPr/>
+                  <a14:m>
+                    <m:oMathPara xmlns:m="http://schemas.openxmlformats.org/officeDocument/2006/math">
+                      <m:oMathParaPr>
+                        <m:jc m:val="centerGroup"/>
+                      </m:oMathParaPr>
+                      <m:oMath xmlns:m="http://schemas.openxmlformats.org/officeDocument/2006/math">
+                        <m:r>
+                          <a:rPr lang="fr-FR" b="0" i="1" smtClean="0">
+                            <a:solidFill>
+                              <a:schemeClr val="accent1"/>
+                            </a:solidFill>
+                            <a:latin typeface="Cambria Math" panose="02040503050406030204" pitchFamily="18" charset="0"/>
+                          </a:rPr>
+                          <m:t>𝑥</m:t>
+                        </m:r>
+                      </m:oMath>
+                    </m:oMathPara>
+                  </a14:m>
+                  <a:endParaRPr lang="fr-FR" dirty="0">
+                    <a:solidFill>
+                      <a:schemeClr val="accent1"/>
+                    </a:solidFill>
+                  </a:endParaRPr>
+                </a:p>
+              </p:txBody>
+            </p:sp>
+          </mc:Choice>
+          <mc:Fallback>
+            <p:sp>
+              <p:nvSpPr>
+                <p:cNvPr id="12" name="TextBox 11">
+                  <a:extLst>
+                    <a:ext uri="{FF2B5EF4-FFF2-40B4-BE49-F238E27FC236}">
+                      <a16:creationId xmlns:a16="http://schemas.microsoft.com/office/drawing/2014/main" id="{EFA0049A-57C3-FCED-92D3-9393A95E822D}"/>
+                    </a:ext>
+                  </a:extLst>
+                </p:cNvPr>
+                <p:cNvSpPr txBox="1">
+                  <a:spLocks noRot="1" noChangeAspect="1" noMove="1" noResize="1" noEditPoints="1" noAdjustHandles="1" noChangeArrowheads="1" noChangeShapeType="1" noTextEdit="1"/>
+                </p:cNvSpPr>
+                <p:nvPr/>
+              </p:nvSpPr>
+              <p:spPr>
+                <a:xfrm>
+                  <a:off x="10873125" y="3182856"/>
+                  <a:ext cx="183320" cy="276999"/>
+                </a:xfrm>
+                <a:prstGeom prst="rect">
+                  <a:avLst/>
+                </a:prstGeom>
+                <a:blipFill>
+                  <a:blip r:embed="rId3"/>
+                  <a:stretch>
+                    <a:fillRect l="-20000" r="-13333"/>
+                  </a:stretch>
+                </a:blipFill>
+              </p:spPr>
+              <p:txBody>
+                <a:bodyPr/>
+                <a:lstStyle/>
+                <a:p>
+                  <a:r>
+                    <a:rPr lang="fr-FR">
+                      <a:noFill/>
+                    </a:rPr>
+                    <a:t> </a:t>
+                  </a:r>
+                </a:p>
+              </p:txBody>
+            </p:sp>
+          </mc:Fallback>
+        </mc:AlternateContent>
+        <p:cxnSp>
+          <p:nvCxnSpPr>
+            <p:cNvPr id="15" name="Straight Connector 14">
+              <a:extLst>
+                <a:ext uri="{FF2B5EF4-FFF2-40B4-BE49-F238E27FC236}">
+                  <a16:creationId xmlns:a16="http://schemas.microsoft.com/office/drawing/2014/main" id="{3035639E-741C-DB2E-60FC-FF0A8FE279F4}"/>
+                </a:ext>
+              </a:extLst>
+            </p:cNvPr>
+            <p:cNvCxnSpPr>
+              <a:cxnSpLocks/>
+            </p:cNvCxnSpPr>
+            <p:nvPr/>
+          </p:nvCxnSpPr>
+          <p:spPr>
+            <a:xfrm rot="10800000" flipV="1">
+              <a:off x="7056513" y="3500282"/>
+              <a:ext cx="3383883" cy="1386361"/>
+            </a:xfrm>
+            <a:prstGeom prst="line">
+              <a:avLst/>
+            </a:prstGeom>
+            <a:ln w="57150">
+              <a:solidFill>
+                <a:schemeClr val="tx1"/>
+              </a:solidFill>
+            </a:ln>
+          </p:spPr>
+          <p:style>
+            <a:lnRef idx="1">
+              <a:schemeClr val="accent1"/>
+            </a:lnRef>
+            <a:fillRef idx="0">
+              <a:schemeClr val="accent1"/>
+            </a:fillRef>
+            <a:effectRef idx="0">
+              <a:schemeClr val="accent1"/>
+            </a:effectRef>
+            <a:fontRef idx="minor">
+              <a:schemeClr val="tx1"/>
+            </a:fontRef>
+          </p:style>
+        </p:cxnSp>
+        <p:cxnSp>
+          <p:nvCxnSpPr>
+            <p:cNvPr id="17" name="Straight Connector 16">
+              <a:extLst>
+                <a:ext uri="{FF2B5EF4-FFF2-40B4-BE49-F238E27FC236}">
+                  <a16:creationId xmlns:a16="http://schemas.microsoft.com/office/drawing/2014/main" id="{E57894B4-543C-DD83-0748-51A84065E5BB}"/>
+                </a:ext>
+              </a:extLst>
+            </p:cNvPr>
+            <p:cNvCxnSpPr>
+              <a:cxnSpLocks/>
+            </p:cNvCxnSpPr>
+            <p:nvPr/>
+          </p:nvCxnSpPr>
+          <p:spPr>
+            <a:xfrm rot="10800000" flipH="1" flipV="1">
+              <a:off x="2130550" y="3500282"/>
+              <a:ext cx="4947529" cy="1386361"/>
+            </a:xfrm>
+            <a:prstGeom prst="line">
+              <a:avLst/>
+            </a:prstGeom>
+            <a:ln w="57150">
+              <a:solidFill>
+                <a:schemeClr val="tx1"/>
+              </a:solidFill>
+            </a:ln>
+          </p:spPr>
+          <p:style>
+            <a:lnRef idx="1">
+              <a:schemeClr val="accent1"/>
+            </a:lnRef>
+            <a:fillRef idx="0">
+              <a:schemeClr val="accent1"/>
+            </a:fillRef>
+            <a:effectRef idx="0">
+              <a:schemeClr val="accent1"/>
+            </a:effectRef>
+            <a:fontRef idx="minor">
+              <a:schemeClr val="tx1"/>
+            </a:fontRef>
+          </p:style>
+        </p:cxnSp>
+        <p:grpSp>
+          <p:nvGrpSpPr>
+            <p:cNvPr id="32" name="Group 31">
+              <a:extLst>
+                <a:ext uri="{FF2B5EF4-FFF2-40B4-BE49-F238E27FC236}">
+                  <a16:creationId xmlns:a16="http://schemas.microsoft.com/office/drawing/2014/main" id="{5CE32732-AD59-C88C-6D6E-C7E98910B0CD}"/>
+                </a:ext>
+              </a:extLst>
+            </p:cNvPr>
+            <p:cNvGrpSpPr/>
+            <p:nvPr/>
+          </p:nvGrpSpPr>
+          <p:grpSpPr>
+            <a:xfrm rot="10800000">
+              <a:off x="10440397" y="3223093"/>
+              <a:ext cx="111857" cy="768288"/>
+              <a:chOff x="6527321" y="738790"/>
+              <a:chExt cx="111857" cy="768288"/>
+            </a:xfrm>
+          </p:grpSpPr>
+          <p:cxnSp>
+            <p:nvCxnSpPr>
+              <p:cNvPr id="22" name="Straight Connector 21">
+                <a:extLst>
+                  <a:ext uri="{FF2B5EF4-FFF2-40B4-BE49-F238E27FC236}">
+                    <a16:creationId xmlns:a16="http://schemas.microsoft.com/office/drawing/2014/main" id="{0AADF1D4-742B-9D4C-812F-B33679FD83F3}"/>
+                  </a:ext>
+                </a:extLst>
+              </p:cNvPr>
+              <p:cNvCxnSpPr>
+                <a:cxnSpLocks/>
+              </p:cNvCxnSpPr>
+              <p:nvPr/>
+            </p:nvCxnSpPr>
+            <p:spPr>
+              <a:xfrm>
+                <a:off x="6639178" y="866838"/>
+                <a:ext cx="0" cy="640240"/>
+              </a:xfrm>
+              <a:prstGeom prst="line">
+                <a:avLst/>
+              </a:prstGeom>
+            </p:spPr>
+            <p:style>
+              <a:lnRef idx="1">
+                <a:schemeClr val="dk1"/>
+              </a:lnRef>
+              <a:fillRef idx="0">
+                <a:schemeClr val="dk1"/>
+              </a:fillRef>
+              <a:effectRef idx="0">
+                <a:schemeClr val="dk1"/>
+              </a:effectRef>
+              <a:fontRef idx="minor">
+                <a:schemeClr val="tx1"/>
+              </a:fontRef>
+            </p:style>
+          </p:cxnSp>
+          <p:cxnSp>
+            <p:nvCxnSpPr>
+              <p:cNvPr id="23" name="Straight Connector 22">
+                <a:extLst>
+                  <a:ext uri="{FF2B5EF4-FFF2-40B4-BE49-F238E27FC236}">
+                    <a16:creationId xmlns:a16="http://schemas.microsoft.com/office/drawing/2014/main" id="{0CA574D0-6F60-DFA6-0426-B91E45D802AC}"/>
+                  </a:ext>
+                </a:extLst>
+              </p:cNvPr>
+              <p:cNvCxnSpPr>
+                <a:cxnSpLocks/>
+              </p:cNvCxnSpPr>
+              <p:nvPr/>
+            </p:nvCxnSpPr>
+            <p:spPr>
+              <a:xfrm>
+                <a:off x="6527321" y="1379030"/>
+                <a:ext cx="111857" cy="128048"/>
+              </a:xfrm>
+              <a:prstGeom prst="line">
+                <a:avLst/>
+              </a:prstGeom>
+            </p:spPr>
+            <p:style>
+              <a:lnRef idx="1">
+                <a:schemeClr val="dk1"/>
+              </a:lnRef>
+              <a:fillRef idx="0">
+                <a:schemeClr val="dk1"/>
+              </a:fillRef>
+              <a:effectRef idx="0">
+                <a:schemeClr val="dk1"/>
+              </a:effectRef>
+              <a:fontRef idx="minor">
+                <a:schemeClr val="tx1"/>
+              </a:fontRef>
+            </p:style>
+          </p:cxnSp>
+          <p:cxnSp>
+            <p:nvCxnSpPr>
+              <p:cNvPr id="26" name="Straight Connector 25">
+                <a:extLst>
+                  <a:ext uri="{FF2B5EF4-FFF2-40B4-BE49-F238E27FC236}">
+                    <a16:creationId xmlns:a16="http://schemas.microsoft.com/office/drawing/2014/main" id="{647D35F5-7C44-4C68-A45D-03D5F2CB6B0D}"/>
+                  </a:ext>
+                </a:extLst>
+              </p:cNvPr>
+              <p:cNvCxnSpPr>
+                <a:cxnSpLocks/>
+              </p:cNvCxnSpPr>
+              <p:nvPr/>
+            </p:nvCxnSpPr>
+            <p:spPr>
+              <a:xfrm>
+                <a:off x="6527321" y="1250982"/>
+                <a:ext cx="111857" cy="128048"/>
+              </a:xfrm>
+              <a:prstGeom prst="line">
+                <a:avLst/>
+              </a:prstGeom>
+            </p:spPr>
+            <p:style>
+              <a:lnRef idx="1">
+                <a:schemeClr val="dk1"/>
+              </a:lnRef>
+              <a:fillRef idx="0">
+                <a:schemeClr val="dk1"/>
+              </a:fillRef>
+              <a:effectRef idx="0">
+                <a:schemeClr val="dk1"/>
+              </a:effectRef>
+              <a:fontRef idx="minor">
+                <a:schemeClr val="tx1"/>
+              </a:fontRef>
+            </p:style>
+          </p:cxnSp>
+          <p:cxnSp>
+            <p:nvCxnSpPr>
+              <p:cNvPr id="27" name="Straight Connector 26">
+                <a:extLst>
+                  <a:ext uri="{FF2B5EF4-FFF2-40B4-BE49-F238E27FC236}">
+                    <a16:creationId xmlns:a16="http://schemas.microsoft.com/office/drawing/2014/main" id="{0F9A5103-BAD8-5AC1-E7F0-90329E45F3EB}"/>
+                  </a:ext>
+                </a:extLst>
+              </p:cNvPr>
+              <p:cNvCxnSpPr>
+                <a:cxnSpLocks/>
+              </p:cNvCxnSpPr>
+              <p:nvPr/>
+            </p:nvCxnSpPr>
+            <p:spPr>
+              <a:xfrm>
+                <a:off x="6527321" y="1122934"/>
+                <a:ext cx="111857" cy="128048"/>
+              </a:xfrm>
+              <a:prstGeom prst="line">
+                <a:avLst/>
+              </a:prstGeom>
+            </p:spPr>
+            <p:style>
+              <a:lnRef idx="1">
+                <a:schemeClr val="dk1"/>
+              </a:lnRef>
+              <a:fillRef idx="0">
+                <a:schemeClr val="dk1"/>
+              </a:fillRef>
+              <a:effectRef idx="0">
+                <a:schemeClr val="dk1"/>
+              </a:effectRef>
+              <a:fontRef idx="minor">
+                <a:schemeClr val="tx1"/>
+              </a:fontRef>
+            </p:style>
+          </p:cxnSp>
+          <p:cxnSp>
+            <p:nvCxnSpPr>
+              <p:cNvPr id="28" name="Straight Connector 27">
+                <a:extLst>
+                  <a:ext uri="{FF2B5EF4-FFF2-40B4-BE49-F238E27FC236}">
+                    <a16:creationId xmlns:a16="http://schemas.microsoft.com/office/drawing/2014/main" id="{36D68B4A-9FBF-0A1B-D6A3-2E99447D4FE0}"/>
+                  </a:ext>
+                </a:extLst>
+              </p:cNvPr>
+              <p:cNvCxnSpPr>
+                <a:cxnSpLocks/>
+              </p:cNvCxnSpPr>
+              <p:nvPr/>
+            </p:nvCxnSpPr>
+            <p:spPr>
+              <a:xfrm>
+                <a:off x="6527321" y="994886"/>
+                <a:ext cx="111857" cy="128048"/>
+              </a:xfrm>
+              <a:prstGeom prst="line">
+                <a:avLst/>
+              </a:prstGeom>
+            </p:spPr>
+            <p:style>
+              <a:lnRef idx="1">
+                <a:schemeClr val="dk1"/>
+              </a:lnRef>
+              <a:fillRef idx="0">
+                <a:schemeClr val="dk1"/>
+              </a:fillRef>
+              <a:effectRef idx="0">
+                <a:schemeClr val="dk1"/>
+              </a:effectRef>
+              <a:fontRef idx="minor">
+                <a:schemeClr val="tx1"/>
+              </a:fontRef>
+            </p:style>
+          </p:cxnSp>
+          <p:cxnSp>
+            <p:nvCxnSpPr>
+              <p:cNvPr id="29" name="Straight Connector 28">
+                <a:extLst>
+                  <a:ext uri="{FF2B5EF4-FFF2-40B4-BE49-F238E27FC236}">
+                    <a16:creationId xmlns:a16="http://schemas.microsoft.com/office/drawing/2014/main" id="{BE0795C3-D1B7-933F-2D5F-3D8AF4260834}"/>
+                  </a:ext>
+                </a:extLst>
+              </p:cNvPr>
+              <p:cNvCxnSpPr>
+                <a:cxnSpLocks/>
+              </p:cNvCxnSpPr>
+              <p:nvPr/>
+            </p:nvCxnSpPr>
+            <p:spPr>
+              <a:xfrm>
+                <a:off x="6527321" y="866838"/>
+                <a:ext cx="111857" cy="128048"/>
+              </a:xfrm>
+              <a:prstGeom prst="line">
+                <a:avLst/>
+              </a:prstGeom>
+            </p:spPr>
+            <p:style>
+              <a:lnRef idx="1">
+                <a:schemeClr val="dk1"/>
+              </a:lnRef>
+              <a:fillRef idx="0">
+                <a:schemeClr val="dk1"/>
+              </a:fillRef>
+              <a:effectRef idx="0">
+                <a:schemeClr val="dk1"/>
+              </a:effectRef>
+              <a:fontRef idx="minor">
+                <a:schemeClr val="tx1"/>
+              </a:fontRef>
+            </p:style>
+          </p:cxnSp>
+          <p:cxnSp>
+            <p:nvCxnSpPr>
+              <p:cNvPr id="30" name="Straight Connector 29">
+                <a:extLst>
+                  <a:ext uri="{FF2B5EF4-FFF2-40B4-BE49-F238E27FC236}">
+                    <a16:creationId xmlns:a16="http://schemas.microsoft.com/office/drawing/2014/main" id="{0731BBEB-F0B0-2F4D-5B87-5AF6B6D9A910}"/>
+                  </a:ext>
+                </a:extLst>
+              </p:cNvPr>
+              <p:cNvCxnSpPr>
+                <a:cxnSpLocks/>
+              </p:cNvCxnSpPr>
+              <p:nvPr/>
+            </p:nvCxnSpPr>
+            <p:spPr>
+              <a:xfrm>
+                <a:off x="6527321" y="738790"/>
+                <a:ext cx="111857" cy="128048"/>
+              </a:xfrm>
+              <a:prstGeom prst="line">
+                <a:avLst/>
+              </a:prstGeom>
+            </p:spPr>
+            <p:style>
+              <a:lnRef idx="1">
+                <a:schemeClr val="dk1"/>
+              </a:lnRef>
+              <a:fillRef idx="0">
+                <a:schemeClr val="dk1"/>
+              </a:fillRef>
+              <a:effectRef idx="0">
+                <a:schemeClr val="dk1"/>
+              </a:effectRef>
+              <a:fontRef idx="minor">
+                <a:schemeClr val="tx1"/>
+              </a:fontRef>
+            </p:style>
+          </p:cxnSp>
+        </p:grpSp>
+        <p:grpSp>
+          <p:nvGrpSpPr>
+            <p:cNvPr id="33" name="Group 32">
+              <a:extLst>
+                <a:ext uri="{FF2B5EF4-FFF2-40B4-BE49-F238E27FC236}">
+                  <a16:creationId xmlns:a16="http://schemas.microsoft.com/office/drawing/2014/main" id="{97E46209-21C4-6EDA-E7AB-C636B40473C7}"/>
+                </a:ext>
+              </a:extLst>
+            </p:cNvPr>
+            <p:cNvGrpSpPr/>
+            <p:nvPr/>
+          </p:nvGrpSpPr>
+          <p:grpSpPr>
+            <a:xfrm>
+              <a:off x="2018693" y="3095045"/>
+              <a:ext cx="111857" cy="768288"/>
+              <a:chOff x="6527321" y="738790"/>
+              <a:chExt cx="111857" cy="768288"/>
+            </a:xfrm>
+          </p:grpSpPr>
+          <p:cxnSp>
+            <p:nvCxnSpPr>
+              <p:cNvPr id="34" name="Straight Connector 33">
+                <a:extLst>
+                  <a:ext uri="{FF2B5EF4-FFF2-40B4-BE49-F238E27FC236}">
+                    <a16:creationId xmlns:a16="http://schemas.microsoft.com/office/drawing/2014/main" id="{A917AC07-4F28-0252-14AD-B75C8B5A389C}"/>
+                  </a:ext>
+                </a:extLst>
+              </p:cNvPr>
+              <p:cNvCxnSpPr>
+                <a:cxnSpLocks/>
+              </p:cNvCxnSpPr>
+              <p:nvPr/>
+            </p:nvCxnSpPr>
+            <p:spPr>
+              <a:xfrm>
+                <a:off x="6639178" y="866838"/>
+                <a:ext cx="0" cy="640240"/>
+              </a:xfrm>
+              <a:prstGeom prst="line">
+                <a:avLst/>
+              </a:prstGeom>
+            </p:spPr>
+            <p:style>
+              <a:lnRef idx="1">
+                <a:schemeClr val="dk1"/>
+              </a:lnRef>
+              <a:fillRef idx="0">
+                <a:schemeClr val="dk1"/>
+              </a:fillRef>
+              <a:effectRef idx="0">
+                <a:schemeClr val="dk1"/>
+              </a:effectRef>
+              <a:fontRef idx="minor">
+                <a:schemeClr val="tx1"/>
+              </a:fontRef>
+            </p:style>
+          </p:cxnSp>
+          <p:cxnSp>
+            <p:nvCxnSpPr>
+              <p:cNvPr id="35" name="Straight Connector 34">
+                <a:extLst>
+                  <a:ext uri="{FF2B5EF4-FFF2-40B4-BE49-F238E27FC236}">
+                    <a16:creationId xmlns:a16="http://schemas.microsoft.com/office/drawing/2014/main" id="{44A8DA16-BD81-3541-40E4-E41F39B5E3F4}"/>
+                  </a:ext>
+                </a:extLst>
+              </p:cNvPr>
+              <p:cNvCxnSpPr>
+                <a:cxnSpLocks/>
+              </p:cNvCxnSpPr>
+              <p:nvPr/>
+            </p:nvCxnSpPr>
+            <p:spPr>
+              <a:xfrm>
+                <a:off x="6527321" y="1379030"/>
+                <a:ext cx="111857" cy="128048"/>
+              </a:xfrm>
+              <a:prstGeom prst="line">
+                <a:avLst/>
+              </a:prstGeom>
+            </p:spPr>
+            <p:style>
+              <a:lnRef idx="1">
+                <a:schemeClr val="dk1"/>
+              </a:lnRef>
+              <a:fillRef idx="0">
+                <a:schemeClr val="dk1"/>
+              </a:fillRef>
+              <a:effectRef idx="0">
+                <a:schemeClr val="dk1"/>
+              </a:effectRef>
+              <a:fontRef idx="minor">
+                <a:schemeClr val="tx1"/>
+              </a:fontRef>
+            </p:style>
+          </p:cxnSp>
+          <p:cxnSp>
+            <p:nvCxnSpPr>
+              <p:cNvPr id="36" name="Straight Connector 35">
+                <a:extLst>
+                  <a:ext uri="{FF2B5EF4-FFF2-40B4-BE49-F238E27FC236}">
+                    <a16:creationId xmlns:a16="http://schemas.microsoft.com/office/drawing/2014/main" id="{09EA1F70-55CB-5712-9CB9-14AFCFFBD824}"/>
+                  </a:ext>
+                </a:extLst>
+              </p:cNvPr>
+              <p:cNvCxnSpPr>
+                <a:cxnSpLocks/>
+              </p:cNvCxnSpPr>
+              <p:nvPr/>
+            </p:nvCxnSpPr>
+            <p:spPr>
+              <a:xfrm>
+                <a:off x="6527321" y="1250982"/>
+                <a:ext cx="111857" cy="128048"/>
+              </a:xfrm>
+              <a:prstGeom prst="line">
+                <a:avLst/>
+              </a:prstGeom>
+            </p:spPr>
+            <p:style>
+              <a:lnRef idx="1">
+                <a:schemeClr val="dk1"/>
+              </a:lnRef>
+              <a:fillRef idx="0">
+                <a:schemeClr val="dk1"/>
+              </a:fillRef>
+              <a:effectRef idx="0">
+                <a:schemeClr val="dk1"/>
+              </a:effectRef>
+              <a:fontRef idx="minor">
+                <a:schemeClr val="tx1"/>
+              </a:fontRef>
+            </p:style>
+          </p:cxnSp>
+          <p:cxnSp>
+            <p:nvCxnSpPr>
+              <p:cNvPr id="37" name="Straight Connector 36">
+                <a:extLst>
+                  <a:ext uri="{FF2B5EF4-FFF2-40B4-BE49-F238E27FC236}">
+                    <a16:creationId xmlns:a16="http://schemas.microsoft.com/office/drawing/2014/main" id="{970441E1-D01D-2BCB-8FB3-6C91155238C4}"/>
+                  </a:ext>
+                </a:extLst>
+              </p:cNvPr>
+              <p:cNvCxnSpPr>
+                <a:cxnSpLocks/>
+              </p:cNvCxnSpPr>
+              <p:nvPr/>
+            </p:nvCxnSpPr>
+            <p:spPr>
+              <a:xfrm>
+                <a:off x="6527321" y="1122934"/>
+                <a:ext cx="111857" cy="128048"/>
+              </a:xfrm>
+              <a:prstGeom prst="line">
+                <a:avLst/>
+              </a:prstGeom>
+            </p:spPr>
+            <p:style>
+              <a:lnRef idx="1">
+                <a:schemeClr val="dk1"/>
+              </a:lnRef>
+              <a:fillRef idx="0">
+                <a:schemeClr val="dk1"/>
+              </a:fillRef>
+              <a:effectRef idx="0">
+                <a:schemeClr val="dk1"/>
+              </a:effectRef>
+              <a:fontRef idx="minor">
+                <a:schemeClr val="tx1"/>
+              </a:fontRef>
+            </p:style>
+          </p:cxnSp>
+          <p:cxnSp>
+            <p:nvCxnSpPr>
+              <p:cNvPr id="38" name="Straight Connector 37">
+                <a:extLst>
+                  <a:ext uri="{FF2B5EF4-FFF2-40B4-BE49-F238E27FC236}">
+                    <a16:creationId xmlns:a16="http://schemas.microsoft.com/office/drawing/2014/main" id="{807137C7-3D2A-43F1-9321-BACF60D274B3}"/>
+                  </a:ext>
+                </a:extLst>
+              </p:cNvPr>
+              <p:cNvCxnSpPr>
+                <a:cxnSpLocks/>
+              </p:cNvCxnSpPr>
+              <p:nvPr/>
+            </p:nvCxnSpPr>
+            <p:spPr>
+              <a:xfrm>
+                <a:off x="6527321" y="994886"/>
+                <a:ext cx="111857" cy="128048"/>
+              </a:xfrm>
+              <a:prstGeom prst="line">
+                <a:avLst/>
+              </a:prstGeom>
+            </p:spPr>
+            <p:style>
+              <a:lnRef idx="1">
+                <a:schemeClr val="dk1"/>
+              </a:lnRef>
+              <a:fillRef idx="0">
+                <a:schemeClr val="dk1"/>
+              </a:fillRef>
+              <a:effectRef idx="0">
+                <a:schemeClr val="dk1"/>
+              </a:effectRef>
+              <a:fontRef idx="minor">
+                <a:schemeClr val="tx1"/>
+              </a:fontRef>
+            </p:style>
+          </p:cxnSp>
+          <p:cxnSp>
+            <p:nvCxnSpPr>
+              <p:cNvPr id="39" name="Straight Connector 38">
+                <a:extLst>
+                  <a:ext uri="{FF2B5EF4-FFF2-40B4-BE49-F238E27FC236}">
+                    <a16:creationId xmlns:a16="http://schemas.microsoft.com/office/drawing/2014/main" id="{E4B68900-C852-447B-9D60-D497ACC252F0}"/>
+                  </a:ext>
+                </a:extLst>
+              </p:cNvPr>
+              <p:cNvCxnSpPr>
+                <a:cxnSpLocks/>
+              </p:cNvCxnSpPr>
+              <p:nvPr/>
+            </p:nvCxnSpPr>
+            <p:spPr>
+              <a:xfrm>
+                <a:off x="6527321" y="866838"/>
+                <a:ext cx="111857" cy="128048"/>
+              </a:xfrm>
+              <a:prstGeom prst="line">
+                <a:avLst/>
+              </a:prstGeom>
+            </p:spPr>
+            <p:style>
+              <a:lnRef idx="1">
+                <a:schemeClr val="dk1"/>
+              </a:lnRef>
+              <a:fillRef idx="0">
+                <a:schemeClr val="dk1"/>
+              </a:fillRef>
+              <a:effectRef idx="0">
+                <a:schemeClr val="dk1"/>
+              </a:effectRef>
+              <a:fontRef idx="minor">
+                <a:schemeClr val="tx1"/>
+              </a:fontRef>
+            </p:style>
+          </p:cxnSp>
+          <p:cxnSp>
+            <p:nvCxnSpPr>
+              <p:cNvPr id="40" name="Straight Connector 39">
+                <a:extLst>
+                  <a:ext uri="{FF2B5EF4-FFF2-40B4-BE49-F238E27FC236}">
+                    <a16:creationId xmlns:a16="http://schemas.microsoft.com/office/drawing/2014/main" id="{9637F6E8-9BAD-524F-ED97-C9BF0A75EC04}"/>
+                  </a:ext>
+                </a:extLst>
+              </p:cNvPr>
+              <p:cNvCxnSpPr>
+                <a:cxnSpLocks/>
+              </p:cNvCxnSpPr>
+              <p:nvPr/>
+            </p:nvCxnSpPr>
+            <p:spPr>
+              <a:xfrm>
+                <a:off x="6527321" y="738790"/>
+                <a:ext cx="111857" cy="128048"/>
+              </a:xfrm>
+              <a:prstGeom prst="line">
+                <a:avLst/>
+              </a:prstGeom>
+            </p:spPr>
+            <p:style>
+              <a:lnRef idx="1">
+                <a:schemeClr val="dk1"/>
+              </a:lnRef>
+              <a:fillRef idx="0">
+                <a:schemeClr val="dk1"/>
+              </a:fillRef>
+              <a:effectRef idx="0">
+                <a:schemeClr val="dk1"/>
+              </a:effectRef>
+              <a:fontRef idx="minor">
+                <a:schemeClr val="tx1"/>
+              </a:fontRef>
+            </p:style>
+          </p:cxnSp>
+        </p:grpSp>
+        <p:cxnSp>
+          <p:nvCxnSpPr>
+            <p:cNvPr id="46" name="Straight Arrow Connector 45">
+              <a:extLst>
+                <a:ext uri="{FF2B5EF4-FFF2-40B4-BE49-F238E27FC236}">
+                  <a16:creationId xmlns:a16="http://schemas.microsoft.com/office/drawing/2014/main" id="{DADDEAB0-F57F-25E6-DD7C-7E591FA629F3}"/>
+                </a:ext>
+              </a:extLst>
+            </p:cNvPr>
+            <p:cNvCxnSpPr>
+              <a:cxnSpLocks/>
+            </p:cNvCxnSpPr>
+            <p:nvPr/>
+          </p:nvCxnSpPr>
+          <p:spPr>
+            <a:xfrm rot="10800000">
+              <a:off x="7065139" y="3500282"/>
+              <a:ext cx="0" cy="1340262"/>
+            </a:xfrm>
+            <a:prstGeom prst="straightConnector1">
+              <a:avLst/>
+            </a:prstGeom>
+            <a:ln w="19050">
+              <a:solidFill>
+                <a:schemeClr val="bg1">
+                  <a:lumMod val="50000"/>
+                </a:schemeClr>
+              </a:solidFill>
+              <a:prstDash val="solid"/>
+              <a:headEnd type="triangle"/>
+              <a:tailEnd type="triangle"/>
+            </a:ln>
+          </p:spPr>
+          <p:style>
+            <a:lnRef idx="1">
+              <a:schemeClr val="accent1"/>
+            </a:lnRef>
+            <a:fillRef idx="0">
+              <a:schemeClr val="accent1"/>
+            </a:fillRef>
+            <a:effectRef idx="0">
+              <a:schemeClr val="accent1"/>
+            </a:effectRef>
+            <a:fontRef idx="minor">
+              <a:schemeClr val="tx1"/>
+            </a:fontRef>
+          </p:style>
+        </p:cxnSp>
+        <mc:AlternateContent xmlns:mc="http://schemas.openxmlformats.org/markup-compatibility/2006">
+          <mc:Choice xmlns:a14="http://schemas.microsoft.com/office/drawing/2010/main" Requires="a14">
+            <p:sp>
+              <p:nvSpPr>
+                <p:cNvPr id="60" name="TextBox 59">
+                  <a:extLst>
+                    <a:ext uri="{FF2B5EF4-FFF2-40B4-BE49-F238E27FC236}">
+                      <a16:creationId xmlns:a16="http://schemas.microsoft.com/office/drawing/2014/main" id="{4476EE56-5B80-31C4-0E92-974184E0B9C4}"/>
+                    </a:ext>
+                  </a:extLst>
+                </p:cNvPr>
+                <p:cNvSpPr txBox="1"/>
+                <p:nvPr/>
+              </p:nvSpPr>
+              <p:spPr>
+                <a:xfrm>
+                  <a:off x="6293132" y="3706300"/>
+                  <a:ext cx="772006" cy="677108"/>
+                </a:xfrm>
+                <a:prstGeom prst="rect">
+                  <a:avLst/>
+                </a:prstGeom>
+                <a:noFill/>
+              </p:spPr>
+              <p:txBody>
+                <a:bodyPr wrap="none" lIns="0" tIns="0" rIns="0" bIns="0" rtlCol="0">
+                  <a:spAutoFit/>
+                </a:bodyPr>
+                <a:lstStyle/>
+                <a:p>
+                  <a:pPr/>
+                  <a14:m>
+                    <m:oMathPara xmlns:m="http://schemas.openxmlformats.org/officeDocument/2006/math">
+                      <m:oMathParaPr>
+                        <m:jc m:val="centerGroup"/>
+                      </m:oMathParaPr>
+                      <m:oMath xmlns:m="http://schemas.openxmlformats.org/officeDocument/2006/math">
+                        <m:sSub>
+                          <m:sSubPr>
+                            <m:ctrlPr>
+                              <a:rPr lang="fr-FR" sz="4400" b="1" i="1" smtClean="0">
+                                <a:solidFill>
+                                  <a:schemeClr val="bg1">
+                                    <a:lumMod val="50000"/>
+                                  </a:schemeClr>
+                                </a:solidFill>
+                                <a:latin typeface="Cambria Math" panose="02040503050406030204" pitchFamily="18" charset="0"/>
+                              </a:rPr>
+                            </m:ctrlPr>
+                          </m:sSubPr>
+                          <m:e>
+                            <m:r>
+                              <a:rPr lang="fr-FR" sz="4400" b="1" i="1" smtClean="0">
+                                <a:solidFill>
+                                  <a:schemeClr val="bg1">
+                                    <a:lumMod val="50000"/>
+                                  </a:schemeClr>
+                                </a:solidFill>
+                                <a:latin typeface="Cambria Math" panose="02040503050406030204" pitchFamily="18" charset="0"/>
+                              </a:rPr>
+                              <m:t>𝑨</m:t>
+                            </m:r>
+                          </m:e>
+                          <m:sub>
+                            <m:r>
+                              <a:rPr lang="fr-FR" sz="4400" b="1" i="1" smtClean="0">
+                                <a:solidFill>
+                                  <a:schemeClr val="bg1">
+                                    <a:lumMod val="50000"/>
+                                  </a:schemeClr>
+                                </a:solidFill>
+                                <a:latin typeface="Cambria Math" panose="02040503050406030204" pitchFamily="18" charset="0"/>
+                              </a:rPr>
+                              <m:t>𝟎</m:t>
+                            </m:r>
+                          </m:sub>
+                        </m:sSub>
+                      </m:oMath>
+                    </m:oMathPara>
+                  </a14:m>
+                  <a:endParaRPr lang="fr-FR" sz="4400" b="1" dirty="0">
+                    <a:solidFill>
+                      <a:schemeClr val="bg1">
+                        <a:lumMod val="50000"/>
+                      </a:schemeClr>
+                    </a:solidFill>
+                  </a:endParaRPr>
+                </a:p>
+              </p:txBody>
+            </p:sp>
+          </mc:Choice>
+          <mc:Fallback>
+            <p:sp>
+              <p:nvSpPr>
+                <p:cNvPr id="60" name="TextBox 59">
+                  <a:extLst>
+                    <a:ext uri="{FF2B5EF4-FFF2-40B4-BE49-F238E27FC236}">
+                      <a16:creationId xmlns:a16="http://schemas.microsoft.com/office/drawing/2014/main" id="{4476EE56-5B80-31C4-0E92-974184E0B9C4}"/>
+                    </a:ext>
+                  </a:extLst>
+                </p:cNvPr>
+                <p:cNvSpPr txBox="1">
+                  <a:spLocks noRot="1" noChangeAspect="1" noMove="1" noResize="1" noEditPoints="1" noAdjustHandles="1" noChangeArrowheads="1" noChangeShapeType="1" noTextEdit="1"/>
+                </p:cNvSpPr>
+                <p:nvPr/>
+              </p:nvSpPr>
+              <p:spPr>
+                <a:xfrm>
+                  <a:off x="6293132" y="3706300"/>
+                  <a:ext cx="772006" cy="677108"/>
+                </a:xfrm>
+                <a:prstGeom prst="rect">
+                  <a:avLst/>
+                </a:prstGeom>
+                <a:blipFill>
+                  <a:blip r:embed="rId4"/>
+                  <a:stretch>
+                    <a:fillRect/>
+                  </a:stretch>
+                </a:blipFill>
+              </p:spPr>
+              <p:txBody>
+                <a:bodyPr/>
+                <a:lstStyle/>
+                <a:p>
+                  <a:r>
+                    <a:rPr lang="fr-FR">
+                      <a:noFill/>
+                    </a:rPr>
+                    <a:t> </a:t>
+                  </a:r>
+                </a:p>
+              </p:txBody>
+            </p:sp>
+          </mc:Fallback>
+        </mc:AlternateContent>
+        <mc:AlternateContent xmlns:mc="http://schemas.openxmlformats.org/markup-compatibility/2006">
+          <mc:Choice xmlns:a14="http://schemas.microsoft.com/office/drawing/2010/main" Requires="a14">
+            <p:sp>
+              <p:nvSpPr>
+                <p:cNvPr id="61" name="TextBox 60">
+                  <a:extLst>
+                    <a:ext uri="{FF2B5EF4-FFF2-40B4-BE49-F238E27FC236}">
+                      <a16:creationId xmlns:a16="http://schemas.microsoft.com/office/drawing/2014/main" id="{3792A3EF-EBB8-B909-2113-731C568C5E80}"/>
+                    </a:ext>
+                  </a:extLst>
+                </p:cNvPr>
+                <p:cNvSpPr txBox="1"/>
+                <p:nvPr/>
+              </p:nvSpPr>
+              <p:spPr>
+                <a:xfrm>
+                  <a:off x="6716121" y="2756491"/>
+                  <a:ext cx="723916" cy="677108"/>
+                </a:xfrm>
+                <a:prstGeom prst="rect">
+                  <a:avLst/>
+                </a:prstGeom>
+                <a:noFill/>
+              </p:spPr>
+              <p:txBody>
+                <a:bodyPr wrap="none" lIns="0" tIns="0" rIns="0" bIns="0" rtlCol="0">
+                  <a:spAutoFit/>
+                </a:bodyPr>
+                <a:lstStyle/>
+                <a:p>
+                  <a:pPr/>
+                  <a14:m>
+                    <m:oMathPara xmlns:m="http://schemas.openxmlformats.org/officeDocument/2006/math">
+                      <m:oMathParaPr>
+                        <m:jc m:val="centerGroup"/>
+                      </m:oMathParaPr>
+                      <m:oMath xmlns:m="http://schemas.openxmlformats.org/officeDocument/2006/math">
+                        <m:sSub>
+                          <m:sSubPr>
+                            <m:ctrlPr>
+                              <a:rPr lang="fr-FR" sz="4400" b="1" i="1" smtClean="0">
+                                <a:solidFill>
+                                  <a:schemeClr val="bg1">
+                                    <a:lumMod val="50000"/>
+                                  </a:schemeClr>
+                                </a:solidFill>
+                                <a:latin typeface="Cambria Math" panose="02040503050406030204" pitchFamily="18" charset="0"/>
+                              </a:rPr>
+                            </m:ctrlPr>
+                          </m:sSubPr>
+                          <m:e>
+                            <m:r>
+                              <a:rPr lang="fr-FR" sz="4400" b="1" i="1" smtClean="0">
+                                <a:solidFill>
+                                  <a:schemeClr val="bg1">
+                                    <a:lumMod val="50000"/>
+                                  </a:schemeClr>
+                                </a:solidFill>
+                                <a:latin typeface="Cambria Math" panose="02040503050406030204" pitchFamily="18" charset="0"/>
+                              </a:rPr>
+                              <m:t>𝒙</m:t>
+                            </m:r>
+                          </m:e>
+                          <m:sub>
+                            <m:r>
+                              <a:rPr lang="fr-FR" sz="4400" b="1" i="1" smtClean="0">
+                                <a:solidFill>
+                                  <a:schemeClr val="bg1">
+                                    <a:lumMod val="50000"/>
+                                  </a:schemeClr>
+                                </a:solidFill>
+                                <a:latin typeface="Cambria Math" panose="02040503050406030204" pitchFamily="18" charset="0"/>
+                              </a:rPr>
+                              <m:t>𝟎</m:t>
+                            </m:r>
+                          </m:sub>
+                        </m:sSub>
+                      </m:oMath>
+                    </m:oMathPara>
+                  </a14:m>
+                  <a:endParaRPr lang="fr-FR" sz="4400" b="1" dirty="0">
+                    <a:solidFill>
+                      <a:schemeClr val="bg1">
+                        <a:lumMod val="50000"/>
+                      </a:schemeClr>
+                    </a:solidFill>
+                  </a:endParaRPr>
+                </a:p>
+              </p:txBody>
+            </p:sp>
+          </mc:Choice>
+          <mc:Fallback>
+            <p:sp>
+              <p:nvSpPr>
+                <p:cNvPr id="61" name="TextBox 60">
+                  <a:extLst>
+                    <a:ext uri="{FF2B5EF4-FFF2-40B4-BE49-F238E27FC236}">
+                      <a16:creationId xmlns:a16="http://schemas.microsoft.com/office/drawing/2014/main" id="{3792A3EF-EBB8-B909-2113-731C568C5E80}"/>
+                    </a:ext>
+                  </a:extLst>
+                </p:cNvPr>
+                <p:cNvSpPr txBox="1">
+                  <a:spLocks noRot="1" noChangeAspect="1" noMove="1" noResize="1" noEditPoints="1" noAdjustHandles="1" noChangeArrowheads="1" noChangeShapeType="1" noTextEdit="1"/>
+                </p:cNvSpPr>
+                <p:nvPr/>
+              </p:nvSpPr>
+              <p:spPr>
+                <a:xfrm>
+                  <a:off x="6716121" y="2756491"/>
+                  <a:ext cx="723916" cy="677108"/>
+                </a:xfrm>
+                <a:prstGeom prst="rect">
+                  <a:avLst/>
+                </a:prstGeom>
+                <a:blipFill>
+                  <a:blip r:embed="rId5"/>
+                  <a:stretch>
+                    <a:fillRect/>
+                  </a:stretch>
+                </a:blipFill>
+              </p:spPr>
+              <p:txBody>
+                <a:bodyPr/>
+                <a:lstStyle/>
+                <a:p>
+                  <a:r>
+                    <a:rPr lang="fr-FR">
+                      <a:noFill/>
+                    </a:rPr>
+                    <a:t> </a:t>
+                  </a:r>
+                </a:p>
+              </p:txBody>
+            </p:sp>
+          </mc:Fallback>
+        </mc:AlternateContent>
+        <mc:AlternateContent xmlns:mc="http://schemas.openxmlformats.org/markup-compatibility/2006">
+          <mc:Choice xmlns:a14="http://schemas.microsoft.com/office/drawing/2010/main" Requires="a14">
+            <p:sp>
+              <p:nvSpPr>
+                <p:cNvPr id="67" name="TextBox 66">
+                  <a:extLst>
+                    <a:ext uri="{FF2B5EF4-FFF2-40B4-BE49-F238E27FC236}">
+                      <a16:creationId xmlns:a16="http://schemas.microsoft.com/office/drawing/2014/main" id="{96AD345E-68D4-44C2-0C4B-3D927F466A5F}"/>
+                    </a:ext>
+                  </a:extLst>
+                </p:cNvPr>
+                <p:cNvSpPr txBox="1"/>
+                <p:nvPr/>
+              </p:nvSpPr>
+              <p:spPr>
+                <a:xfrm>
+                  <a:off x="2159404" y="2905780"/>
+                  <a:ext cx="466473" cy="677108"/>
+                </a:xfrm>
+                <a:prstGeom prst="rect">
+                  <a:avLst/>
+                </a:prstGeom>
+                <a:noFill/>
+              </p:spPr>
+              <p:txBody>
+                <a:bodyPr wrap="none" lIns="0" tIns="0" rIns="0" bIns="0" rtlCol="0">
+                  <a:spAutoFit/>
+                </a:bodyPr>
+                <a:lstStyle/>
+                <a:p>
+                  <a:pPr/>
+                  <a14:m>
+                    <m:oMathPara xmlns:m="http://schemas.openxmlformats.org/officeDocument/2006/math">
+                      <m:oMathParaPr>
+                        <m:jc m:val="centerGroup"/>
+                      </m:oMathParaPr>
+                      <m:oMath xmlns:m="http://schemas.openxmlformats.org/officeDocument/2006/math">
+                        <m:r>
+                          <a:rPr lang="fr-FR" sz="4400" b="1" i="1" smtClean="0">
+                            <a:solidFill>
+                              <a:schemeClr val="bg1">
+                                <a:lumMod val="50000"/>
+                              </a:schemeClr>
+                            </a:solidFill>
+                            <a:latin typeface="Cambria Math" panose="02040503050406030204" pitchFamily="18" charset="0"/>
+                          </a:rPr>
+                          <m:t>𝟎</m:t>
+                        </m:r>
+                      </m:oMath>
+                    </m:oMathPara>
+                  </a14:m>
+                  <a:endParaRPr lang="fr-FR" sz="2400" b="1" dirty="0">
+                    <a:solidFill>
+                      <a:schemeClr val="bg1">
+                        <a:lumMod val="50000"/>
+                      </a:schemeClr>
+                    </a:solidFill>
+                  </a:endParaRPr>
+                </a:p>
+              </p:txBody>
+            </p:sp>
+          </mc:Choice>
+          <mc:Fallback>
+            <p:sp>
+              <p:nvSpPr>
+                <p:cNvPr id="67" name="TextBox 66">
+                  <a:extLst>
+                    <a:ext uri="{FF2B5EF4-FFF2-40B4-BE49-F238E27FC236}">
+                      <a16:creationId xmlns:a16="http://schemas.microsoft.com/office/drawing/2014/main" id="{96AD345E-68D4-44C2-0C4B-3D927F466A5F}"/>
+                    </a:ext>
+                  </a:extLst>
+                </p:cNvPr>
+                <p:cNvSpPr txBox="1">
+                  <a:spLocks noRot="1" noChangeAspect="1" noMove="1" noResize="1" noEditPoints="1" noAdjustHandles="1" noChangeArrowheads="1" noChangeShapeType="1" noTextEdit="1"/>
+                </p:cNvSpPr>
+                <p:nvPr/>
+              </p:nvSpPr>
+              <p:spPr>
+                <a:xfrm>
+                  <a:off x="2159404" y="2905780"/>
+                  <a:ext cx="466473" cy="677108"/>
+                </a:xfrm>
+                <a:prstGeom prst="rect">
+                  <a:avLst/>
+                </a:prstGeom>
+                <a:blipFill>
+                  <a:blip r:embed="rId6"/>
+                  <a:stretch>
+                    <a:fillRect/>
+                  </a:stretch>
+                </a:blipFill>
+              </p:spPr>
+              <p:txBody>
+                <a:bodyPr/>
+                <a:lstStyle/>
+                <a:p>
+                  <a:r>
+                    <a:rPr lang="fr-FR">
+                      <a:noFill/>
+                    </a:rPr>
+                    <a:t> </a:t>
+                  </a:r>
+                </a:p>
+              </p:txBody>
+            </p:sp>
+          </mc:Fallback>
+        </mc:AlternateContent>
+        <mc:AlternateContent xmlns:mc="http://schemas.openxmlformats.org/markup-compatibility/2006">
+          <mc:Choice xmlns:a14="http://schemas.microsoft.com/office/drawing/2010/main" Requires="a14">
+            <p:sp>
+              <p:nvSpPr>
+                <p:cNvPr id="68" name="TextBox 67">
+                  <a:extLst>
+                    <a:ext uri="{FF2B5EF4-FFF2-40B4-BE49-F238E27FC236}">
+                      <a16:creationId xmlns:a16="http://schemas.microsoft.com/office/drawing/2014/main" id="{0D8C0065-B206-C2B3-7D73-05ECC767B5B8}"/>
+                    </a:ext>
+                  </a:extLst>
+                </p:cNvPr>
+                <p:cNvSpPr txBox="1"/>
+                <p:nvPr/>
+              </p:nvSpPr>
+              <p:spPr>
+                <a:xfrm>
+                  <a:off x="9980219" y="2838592"/>
+                  <a:ext cx="447238" cy="677108"/>
+                </a:xfrm>
+                <a:prstGeom prst="rect">
+                  <a:avLst/>
+                </a:prstGeom>
+                <a:noFill/>
+              </p:spPr>
+              <p:txBody>
+                <a:bodyPr wrap="none" lIns="0" tIns="0" rIns="0" bIns="0" rtlCol="0">
+                  <a:spAutoFit/>
+                </a:bodyPr>
+                <a:lstStyle/>
+                <a:p>
+                  <a:pPr/>
+                  <a14:m>
+                    <m:oMathPara xmlns:m="http://schemas.openxmlformats.org/officeDocument/2006/math">
+                      <m:oMathParaPr>
+                        <m:jc m:val="centerGroup"/>
+                      </m:oMathParaPr>
+                      <m:oMath xmlns:m="http://schemas.openxmlformats.org/officeDocument/2006/math">
+                        <m:r>
+                          <a:rPr lang="fr-FR" sz="4400" b="1" i="1" smtClean="0">
+                            <a:solidFill>
+                              <a:schemeClr val="bg1">
+                                <a:lumMod val="50000"/>
+                              </a:schemeClr>
+                            </a:solidFill>
+                            <a:latin typeface="Cambria Math" panose="02040503050406030204" pitchFamily="18" charset="0"/>
+                          </a:rPr>
+                          <m:t>𝑳</m:t>
+                        </m:r>
+                      </m:oMath>
+                    </m:oMathPara>
+                  </a14:m>
+                  <a:endParaRPr lang="fr-FR" sz="2400" b="1" dirty="0">
+                    <a:solidFill>
+                      <a:schemeClr val="bg1">
+                        <a:lumMod val="50000"/>
+                      </a:schemeClr>
+                    </a:solidFill>
+                  </a:endParaRPr>
+                </a:p>
+              </p:txBody>
+            </p:sp>
+          </mc:Choice>
+          <mc:Fallback>
+            <p:sp>
+              <p:nvSpPr>
+                <p:cNvPr id="68" name="TextBox 67">
+                  <a:extLst>
+                    <a:ext uri="{FF2B5EF4-FFF2-40B4-BE49-F238E27FC236}">
+                      <a16:creationId xmlns:a16="http://schemas.microsoft.com/office/drawing/2014/main" id="{0D8C0065-B206-C2B3-7D73-05ECC767B5B8}"/>
+                    </a:ext>
+                  </a:extLst>
+                </p:cNvPr>
+                <p:cNvSpPr txBox="1">
+                  <a:spLocks noRot="1" noChangeAspect="1" noMove="1" noResize="1" noEditPoints="1" noAdjustHandles="1" noChangeArrowheads="1" noChangeShapeType="1" noTextEdit="1"/>
+                </p:cNvSpPr>
+                <p:nvPr/>
+              </p:nvSpPr>
+              <p:spPr>
+                <a:xfrm>
+                  <a:off x="9980219" y="2838592"/>
+                  <a:ext cx="447238" cy="677108"/>
+                </a:xfrm>
+                <a:prstGeom prst="rect">
+                  <a:avLst/>
+                </a:prstGeom>
+                <a:blipFill>
+                  <a:blip r:embed="rId7"/>
+                  <a:stretch>
+                    <a:fillRect/>
+                  </a:stretch>
+                </a:blipFill>
+              </p:spPr>
+              <p:txBody>
+                <a:bodyPr/>
+                <a:lstStyle/>
+                <a:p>
+                  <a:r>
+                    <a:rPr lang="fr-FR">
+                      <a:noFill/>
+                    </a:rPr>
+                    <a:t> </a:t>
+                  </a:r>
+                </a:p>
+              </p:txBody>
+            </p:sp>
+          </mc:Fallback>
+        </mc:AlternateContent>
+      </p:grpSp>
+    </p:spTree>
+    <p:extLst>
+      <p:ext uri="{BB962C8B-B14F-4D97-AF65-F5344CB8AC3E}">
+        <p14:creationId xmlns:p14="http://schemas.microsoft.com/office/powerpoint/2010/main" val="2809204922"/>
+      </p:ext>
+    </p:extLst>
+  </p:cSld>
+  <p:clrMapOvr>
+    <a:masterClrMapping/>
+  </p:clrMapOvr>
+</p:sld>
+</file>
+
+<file path=ppt/slides/slide3.xml><?xml version="1.0" encoding="utf-8"?>
+<p:sld xmlns:a="http://schemas.openxmlformats.org/drawingml/2006/main" xmlns:r="http://schemas.openxmlformats.org/officeDocument/2006/relationships" xmlns:p="http://schemas.openxmlformats.org/presentationml/2006/main">
+  <p:cSld>
+    <p:spTree>
+      <p:nvGrpSpPr>
+        <p:cNvPr id="1" name="">
+          <a:extLst>
+            <a:ext uri="{FF2B5EF4-FFF2-40B4-BE49-F238E27FC236}">
               <a16:creationId xmlns:a16="http://schemas.microsoft.com/office/drawing/2014/main" id="{C5E45205-B93B-084F-451C-23EC28DACAAA}"/>
             </a:ext>
           </a:extLst>
@@ -7689,7 +9237,7 @@
 </p:sld>
 </file>
 
-<file path=ppt/slides/slide3.xml><?xml version="1.0" encoding="utf-8"?>
+<file path=ppt/slides/slide4.xml><?xml version="1.0" encoding="utf-8"?>
 <p:sld xmlns:a="http://schemas.openxmlformats.org/drawingml/2006/main" xmlns:r="http://schemas.openxmlformats.org/officeDocument/2006/relationships" xmlns:p="http://schemas.openxmlformats.org/presentationml/2006/main">
   <p:cSld>
     <p:spTree>
@@ -8215,8 +9763,8 @@
           </a:fontRef>
         </p:style>
       </p:cxnSp>
-      <mc:AlternateContent xmlns:mc="http://schemas.openxmlformats.org/markup-compatibility/2006">
-        <mc:Choice xmlns:a14="http://schemas.microsoft.com/office/drawing/2010/main" Requires="a14">
+      <mc:AlternateContent xmlns:mc="http://schemas.openxmlformats.org/markup-compatibility/2006" xmlns:a14="http://schemas.microsoft.com/office/drawing/2010/main">
+        <mc:Choice Requires="a14">
           <p:sp>
             <p:nvSpPr>
               <p:cNvPr id="69" name="TextBox 68">
@@ -8325,7 +9873,7 @@
             </p:txBody>
           </p:sp>
         </mc:Choice>
-        <mc:Fallback>
+        <mc:Fallback xmlns="">
           <p:sp>
             <p:nvSpPr>
               <p:cNvPr id="69" name="TextBox 68">
@@ -8654,8 +10202,8 @@
           </a:fontRef>
         </p:style>
       </p:cxnSp>
-      <mc:AlternateContent xmlns:mc="http://schemas.openxmlformats.org/markup-compatibility/2006">
-        <mc:Choice xmlns:a14="http://schemas.microsoft.com/office/drawing/2010/main" Requires="a14">
+      <mc:AlternateContent xmlns:mc="http://schemas.openxmlformats.org/markup-compatibility/2006" xmlns:a14="http://schemas.microsoft.com/office/drawing/2010/main">
+        <mc:Choice Requires="a14">
           <p:sp>
             <p:nvSpPr>
               <p:cNvPr id="77" name="TextBox 76">
@@ -8739,7 +10287,7 @@
             </p:txBody>
           </p:sp>
         </mc:Choice>
-        <mc:Fallback>
+        <mc:Fallback xmlns="">
           <p:sp>
             <p:nvSpPr>
               <p:cNvPr id="77" name="TextBox 76">
@@ -8973,7 +10521,7 @@
 </p:sld>
 </file>
 
-<file path=ppt/slides/slide4.xml><?xml version="1.0" encoding="utf-8"?>
+<file path=ppt/slides/slide5.xml><?xml version="1.0" encoding="utf-8"?>
 <p:sld xmlns:a="http://schemas.openxmlformats.org/drawingml/2006/main" xmlns:r="http://schemas.openxmlformats.org/officeDocument/2006/relationships" xmlns:p="http://schemas.openxmlformats.org/presentationml/2006/main">
   <p:cSld>
     <p:spTree>

--- a/Views/Autres/schema.pptx
+++ b/Views/Autres/schema.pptx
@@ -265,7 +265,7 @@
           <a:p>
             <a:fld id="{ABF21FBF-104B-42A2-A428-D4B0ACD1525D}" type="datetimeFigureOut">
               <a:rPr lang="fr-FR" smtClean="0"/>
-              <a:t>17/05/2026</a:t>
+              <a:t>02/06/2026</a:t>
             </a:fld>
             <a:endParaRPr lang="fr-FR"/>
           </a:p>
@@ -465,7 +465,7 @@
           <a:p>
             <a:fld id="{ABF21FBF-104B-42A2-A428-D4B0ACD1525D}" type="datetimeFigureOut">
               <a:rPr lang="fr-FR" smtClean="0"/>
-              <a:t>17/05/2026</a:t>
+              <a:t>02/06/2026</a:t>
             </a:fld>
             <a:endParaRPr lang="fr-FR"/>
           </a:p>
@@ -675,7 +675,7 @@
           <a:p>
             <a:fld id="{ABF21FBF-104B-42A2-A428-D4B0ACD1525D}" type="datetimeFigureOut">
               <a:rPr lang="fr-FR" smtClean="0"/>
-              <a:t>17/05/2026</a:t>
+              <a:t>02/06/2026</a:t>
             </a:fld>
             <a:endParaRPr lang="fr-FR"/>
           </a:p>
@@ -875,7 +875,7 @@
           <a:p>
             <a:fld id="{ABF21FBF-104B-42A2-A428-D4B0ACD1525D}" type="datetimeFigureOut">
               <a:rPr lang="fr-FR" smtClean="0"/>
-              <a:t>17/05/2026</a:t>
+              <a:t>02/06/2026</a:t>
             </a:fld>
             <a:endParaRPr lang="fr-FR"/>
           </a:p>
@@ -1151,7 +1151,7 @@
           <a:p>
             <a:fld id="{ABF21FBF-104B-42A2-A428-D4B0ACD1525D}" type="datetimeFigureOut">
               <a:rPr lang="fr-FR" smtClean="0"/>
-              <a:t>17/05/2026</a:t>
+              <a:t>02/06/2026</a:t>
             </a:fld>
             <a:endParaRPr lang="fr-FR"/>
           </a:p>
@@ -1419,7 +1419,7 @@
           <a:p>
             <a:fld id="{ABF21FBF-104B-42A2-A428-D4B0ACD1525D}" type="datetimeFigureOut">
               <a:rPr lang="fr-FR" smtClean="0"/>
-              <a:t>17/05/2026</a:t>
+              <a:t>02/06/2026</a:t>
             </a:fld>
             <a:endParaRPr lang="fr-FR"/>
           </a:p>
@@ -1834,7 +1834,7 @@
           <a:p>
             <a:fld id="{ABF21FBF-104B-42A2-A428-D4B0ACD1525D}" type="datetimeFigureOut">
               <a:rPr lang="fr-FR" smtClean="0"/>
-              <a:t>17/05/2026</a:t>
+              <a:t>02/06/2026</a:t>
             </a:fld>
             <a:endParaRPr lang="fr-FR"/>
           </a:p>
@@ -1976,7 +1976,7 @@
           <a:p>
             <a:fld id="{ABF21FBF-104B-42A2-A428-D4B0ACD1525D}" type="datetimeFigureOut">
               <a:rPr lang="fr-FR" smtClean="0"/>
-              <a:t>17/05/2026</a:t>
+              <a:t>02/06/2026</a:t>
             </a:fld>
             <a:endParaRPr lang="fr-FR"/>
           </a:p>
@@ -2089,7 +2089,7 @@
           <a:p>
             <a:fld id="{ABF21FBF-104B-42A2-A428-D4B0ACD1525D}" type="datetimeFigureOut">
               <a:rPr lang="fr-FR" smtClean="0"/>
-              <a:t>17/05/2026</a:t>
+              <a:t>02/06/2026</a:t>
             </a:fld>
             <a:endParaRPr lang="fr-FR"/>
           </a:p>
@@ -2402,7 +2402,7 @@
           <a:p>
             <a:fld id="{ABF21FBF-104B-42A2-A428-D4B0ACD1525D}" type="datetimeFigureOut">
               <a:rPr lang="fr-FR" smtClean="0"/>
-              <a:t>17/05/2026</a:t>
+              <a:t>02/06/2026</a:t>
             </a:fld>
             <a:endParaRPr lang="fr-FR"/>
           </a:p>
@@ -2691,7 +2691,7 @@
           <a:p>
             <a:fld id="{ABF21FBF-104B-42A2-A428-D4B0ACD1525D}" type="datetimeFigureOut">
               <a:rPr lang="fr-FR" smtClean="0"/>
-              <a:t>17/05/2026</a:t>
+              <a:t>02/06/2026</a:t>
             </a:fld>
             <a:endParaRPr lang="fr-FR"/>
           </a:p>
@@ -2934,7 +2934,7 @@
           <a:p>
             <a:fld id="{ABF21FBF-104B-42A2-A428-D4B0ACD1525D}" type="datetimeFigureOut">
               <a:rPr lang="fr-FR" smtClean="0"/>
-              <a:t>17/05/2026</a:t>
+              <a:t>02/06/2026</a:t>
             </a:fld>
             <a:endParaRPr lang="fr-FR"/>
           </a:p>
@@ -3366,9 +3366,9 @@
         <p:grpSpPr>
           <a:xfrm>
             <a:off x="1323370" y="2621953"/>
-            <a:ext cx="9331143" cy="2342357"/>
+            <a:ext cx="9371154" cy="2403912"/>
             <a:chOff x="1323370" y="2621953"/>
-            <a:chExt cx="9331143" cy="2342357"/>
+            <a:chExt cx="9371154" cy="2403912"/>
           </a:xfrm>
         </p:grpSpPr>
         <p:cxnSp>
@@ -3459,8 +3459,8 @@
             </a:fontRef>
           </p:style>
         </p:cxnSp>
-        <mc:AlternateContent xmlns:mc="http://schemas.openxmlformats.org/markup-compatibility/2006" xmlns:a14="http://schemas.microsoft.com/office/drawing/2010/main">
-          <mc:Choice Requires="a14">
+        <mc:AlternateContent xmlns:mc="http://schemas.openxmlformats.org/markup-compatibility/2006">
+          <mc:Choice xmlns:a14="http://schemas.microsoft.com/office/drawing/2010/main" Requires="a14">
             <p:sp>
               <p:nvSpPr>
                 <p:cNvPr id="11" name="TextBox 10">
@@ -3476,7 +3476,7 @@
               <p:spPr>
                 <a:xfrm>
                   <a:off x="1323370" y="2621953"/>
-                  <a:ext cx="169084" cy="276999"/>
+                  <a:ext cx="205184" cy="338554"/>
                 </a:xfrm>
                 <a:prstGeom prst="rect">
                   <a:avLst/>
@@ -3497,7 +3497,7 @@
                       </m:oMathParaPr>
                       <m:oMath xmlns:m="http://schemas.openxmlformats.org/officeDocument/2006/math">
                         <m:r>
-                          <a:rPr lang="fr-FR" b="0" i="1" smtClean="0">
+                          <a:rPr lang="fr-FR" sz="2200" b="0" i="1" smtClean="0">
                             <a:solidFill>
                               <a:schemeClr val="accent1"/>
                             </a:solidFill>
@@ -3508,7 +3508,7 @@
                       </m:oMath>
                     </m:oMathPara>
                   </a14:m>
-                  <a:endParaRPr lang="fr-FR" dirty="0">
+                  <a:endParaRPr lang="fr-FR" sz="2200" dirty="0">
                     <a:solidFill>
                       <a:schemeClr val="accent1"/>
                     </a:solidFill>
@@ -3517,7 +3517,7 @@
               </p:txBody>
             </p:sp>
           </mc:Choice>
-          <mc:Fallback xmlns="">
+          <mc:Fallback>
             <p:sp>
               <p:nvSpPr>
                 <p:cNvPr id="11" name="TextBox 10">
@@ -3535,7 +3535,7 @@
               <p:spPr>
                 <a:xfrm>
                   <a:off x="1323370" y="2621953"/>
-                  <a:ext cx="169084" cy="276999"/>
+                  <a:ext cx="205184" cy="338554"/>
                 </a:xfrm>
                 <a:prstGeom prst="rect">
                   <a:avLst/>
@@ -3543,7 +3543,7 @@
                 <a:blipFill>
                   <a:blip r:embed="rId2"/>
                   <a:stretch>
-                    <a:fillRect l="-21429" r="-14286"/>
+                    <a:fillRect l="-17647" r="-14706"/>
                   </a:stretch>
                 </a:blipFill>
               </p:spPr>
@@ -3562,8 +3562,8 @@
             </p:sp>
           </mc:Fallback>
         </mc:AlternateContent>
-        <mc:AlternateContent xmlns:mc="http://schemas.openxmlformats.org/markup-compatibility/2006" xmlns:a14="http://schemas.microsoft.com/office/drawing/2010/main">
-          <mc:Choice Requires="a14">
+        <mc:AlternateContent xmlns:mc="http://schemas.openxmlformats.org/markup-compatibility/2006">
+          <mc:Choice xmlns:a14="http://schemas.microsoft.com/office/drawing/2010/main" Requires="a14">
             <p:sp>
               <p:nvSpPr>
                 <p:cNvPr id="12" name="TextBox 11">
@@ -3579,7 +3579,7 @@
               <p:spPr>
                 <a:xfrm>
                   <a:off x="10471193" y="4687311"/>
-                  <a:ext cx="183320" cy="276999"/>
+                  <a:ext cx="223331" cy="338554"/>
                 </a:xfrm>
                 <a:prstGeom prst="rect">
                   <a:avLst/>
@@ -3600,7 +3600,7 @@
                       </m:oMathParaPr>
                       <m:oMath xmlns:m="http://schemas.openxmlformats.org/officeDocument/2006/math">
                         <m:r>
-                          <a:rPr lang="fr-FR" b="0" i="1" smtClean="0">
+                          <a:rPr lang="fr-FR" sz="2200" b="0" i="1" smtClean="0">
                             <a:solidFill>
                               <a:schemeClr val="accent1"/>
                             </a:solidFill>
@@ -3611,7 +3611,7 @@
                       </m:oMath>
                     </m:oMathPara>
                   </a14:m>
-                  <a:endParaRPr lang="fr-FR" dirty="0">
+                  <a:endParaRPr lang="fr-FR" sz="2200" dirty="0">
                     <a:solidFill>
                       <a:schemeClr val="accent1"/>
                     </a:solidFill>
@@ -3620,7 +3620,7 @@
               </p:txBody>
             </p:sp>
           </mc:Choice>
-          <mc:Fallback xmlns="">
+          <mc:Fallback>
             <p:sp>
               <p:nvSpPr>
                 <p:cNvPr id="12" name="TextBox 11">
@@ -3638,7 +3638,7 @@
               <p:spPr>
                 <a:xfrm>
                   <a:off x="10471193" y="4687311"/>
-                  <a:ext cx="183320" cy="276999"/>
+                  <a:ext cx="223331" cy="338554"/>
                 </a:xfrm>
                 <a:prstGeom prst="rect">
                   <a:avLst/>
@@ -3646,7 +3646,7 @@
                 <a:blipFill>
                   <a:blip r:embed="rId3"/>
                   <a:stretch>
-                    <a:fillRect l="-20000" r="-13333"/>
+                    <a:fillRect l="-19444" r="-11111"/>
                   </a:stretch>
                 </a:blipFill>
               </p:spPr>
@@ -4374,8 +4374,8 @@
           </a:fontRef>
         </p:style>
       </p:cxnSp>
-      <mc:AlternateContent xmlns:mc="http://schemas.openxmlformats.org/markup-compatibility/2006" xmlns:a14="http://schemas.microsoft.com/office/drawing/2010/main">
-        <mc:Choice Requires="a14">
+      <mc:AlternateContent xmlns:mc="http://schemas.openxmlformats.org/markup-compatibility/2006">
+        <mc:Choice xmlns:a14="http://schemas.microsoft.com/office/drawing/2010/main" Requires="a14">
           <p:sp>
             <p:nvSpPr>
               <p:cNvPr id="60" name="TextBox 59">
@@ -4391,7 +4391,7 @@
             <p:spPr>
               <a:xfrm>
                 <a:off x="4950224" y="3855630"/>
-                <a:ext cx="419922" cy="369332"/>
+                <a:ext cx="385234" cy="338554"/>
               </a:xfrm>
               <a:prstGeom prst="rect">
                 <a:avLst/>
@@ -4414,7 +4414,7 @@
                       <m:sSub>
                         <m:sSubPr>
                           <m:ctrlPr>
-                            <a:rPr lang="fr-FR" sz="2400" b="1" i="1" smtClean="0">
+                            <a:rPr lang="fr-FR" sz="2200" b="1" i="1" smtClean="0">
                               <a:solidFill>
                                 <a:schemeClr val="bg1">
                                   <a:lumMod val="50000"/>
@@ -4426,7 +4426,7 @@
                         </m:sSubPr>
                         <m:e>
                           <m:r>
-                            <a:rPr lang="fr-FR" sz="2400" b="1" i="1" smtClean="0">
+                            <a:rPr lang="fr-FR" sz="2200" b="1" i="1" smtClean="0">
                               <a:solidFill>
                                 <a:schemeClr val="bg1">
                                   <a:lumMod val="50000"/>
@@ -4439,7 +4439,7 @@
                         </m:e>
                         <m:sub>
                           <m:r>
-                            <a:rPr lang="fr-FR" sz="2400" b="1" i="1" smtClean="0">
+                            <a:rPr lang="fr-FR" sz="2200" b="1" i="1" smtClean="0">
                               <a:solidFill>
                                 <a:schemeClr val="bg1">
                                   <a:lumMod val="50000"/>
@@ -4454,7 +4454,7 @@
                     </m:oMath>
                   </m:oMathPara>
                 </a14:m>
-                <a:endParaRPr lang="fr-FR" sz="2400" b="1" dirty="0">
+                <a:endParaRPr lang="fr-FR" sz="2200" b="1" dirty="0">
                   <a:solidFill>
                     <a:schemeClr val="bg1">
                       <a:lumMod val="50000"/>
@@ -4465,7 +4465,7 @@
             </p:txBody>
           </p:sp>
         </mc:Choice>
-        <mc:Fallback xmlns="">
+        <mc:Fallback>
           <p:sp>
             <p:nvSpPr>
               <p:cNvPr id="60" name="TextBox 59">
@@ -4483,7 +4483,7 @@
             <p:spPr>
               <a:xfrm>
                 <a:off x="4950224" y="3855630"/>
-                <a:ext cx="419922" cy="369332"/>
+                <a:ext cx="385234" cy="338554"/>
               </a:xfrm>
               <a:prstGeom prst="rect">
                 <a:avLst/>
@@ -4491,7 +4491,7 @@
               <a:blipFill>
                 <a:blip r:embed="rId4"/>
                 <a:stretch>
-                  <a:fillRect l="-15942" r="-7246" b="-14754"/>
+                  <a:fillRect l="-17460" r="-6349" b="-14286"/>
                 </a:stretch>
               </a:blipFill>
             </p:spPr>
@@ -4510,8 +4510,8 @@
           </p:sp>
         </mc:Fallback>
       </mc:AlternateContent>
-      <mc:AlternateContent xmlns:mc="http://schemas.openxmlformats.org/markup-compatibility/2006" xmlns:a14="http://schemas.microsoft.com/office/drawing/2010/main">
-        <mc:Choice Requires="a14">
+      <mc:AlternateContent xmlns:mc="http://schemas.openxmlformats.org/markup-compatibility/2006">
+        <mc:Choice xmlns:a14="http://schemas.microsoft.com/office/drawing/2010/main" Requires="a14">
           <p:sp>
             <p:nvSpPr>
               <p:cNvPr id="61" name="TextBox 60">
@@ -4527,7 +4527,7 @@
             <p:spPr>
               <a:xfrm>
                 <a:off x="4773124" y="4635405"/>
-                <a:ext cx="394275" cy="369332"/>
+                <a:ext cx="361189" cy="338554"/>
               </a:xfrm>
               <a:prstGeom prst="rect">
                 <a:avLst/>
@@ -4550,7 +4550,7 @@
                       <m:sSub>
                         <m:sSubPr>
                           <m:ctrlPr>
-                            <a:rPr lang="fr-FR" sz="2400" b="1" i="1" smtClean="0">
+                            <a:rPr lang="fr-FR" sz="2200" b="1" i="1" smtClean="0">
                               <a:solidFill>
                                 <a:schemeClr val="bg1">
                                   <a:lumMod val="50000"/>
@@ -4562,7 +4562,7 @@
                         </m:sSubPr>
                         <m:e>
                           <m:r>
-                            <a:rPr lang="fr-FR" sz="2400" b="1" i="1" smtClean="0">
+                            <a:rPr lang="fr-FR" sz="2200" b="1" i="1" smtClean="0">
                               <a:solidFill>
                                 <a:schemeClr val="bg1">
                                   <a:lumMod val="50000"/>
@@ -4575,7 +4575,7 @@
                         </m:e>
                         <m:sub>
                           <m:r>
-                            <a:rPr lang="fr-FR" sz="2400" b="1" i="1" smtClean="0">
+                            <a:rPr lang="fr-FR" sz="2200" b="1" i="1" smtClean="0">
                               <a:solidFill>
                                 <a:schemeClr val="bg1">
                                   <a:lumMod val="50000"/>
@@ -4590,7 +4590,7 @@
                     </m:oMath>
                   </m:oMathPara>
                 </a14:m>
-                <a:endParaRPr lang="fr-FR" sz="2400" b="1" dirty="0">
+                <a:endParaRPr lang="fr-FR" sz="2200" b="1" dirty="0">
                   <a:solidFill>
                     <a:schemeClr val="bg1">
                       <a:lumMod val="50000"/>
@@ -4601,7 +4601,7 @@
             </p:txBody>
           </p:sp>
         </mc:Choice>
-        <mc:Fallback xmlns="">
+        <mc:Fallback>
           <p:sp>
             <p:nvSpPr>
               <p:cNvPr id="61" name="TextBox 60">
@@ -4619,7 +4619,7 @@
             <p:spPr>
               <a:xfrm>
                 <a:off x="4773124" y="4635405"/>
-                <a:ext cx="394275" cy="369332"/>
+                <a:ext cx="361189" cy="338554"/>
               </a:xfrm>
               <a:prstGeom prst="rect">
                 <a:avLst/>
@@ -4627,7 +4627,7 @@
               <a:blipFill>
                 <a:blip r:embed="rId5"/>
                 <a:stretch>
-                  <a:fillRect l="-10769" r="-7692" b="-14754"/>
+                  <a:fillRect l="-11864" r="-6780" b="-14286"/>
                 </a:stretch>
               </a:blipFill>
             </p:spPr>
@@ -4732,8 +4732,8 @@
           </a:prstGeom>
         </p:spPr>
       </p:pic>
-      <mc:AlternateContent xmlns:mc="http://schemas.openxmlformats.org/markup-compatibility/2006" xmlns:a14="http://schemas.microsoft.com/office/drawing/2010/main">
-        <mc:Choice Requires="a14">
+      <mc:AlternateContent xmlns:mc="http://schemas.openxmlformats.org/markup-compatibility/2006">
+        <mc:Choice xmlns:a14="http://schemas.microsoft.com/office/drawing/2010/main" Requires="a14">
           <p:sp>
             <p:nvSpPr>
               <p:cNvPr id="64" name="TextBox 63">
@@ -4749,7 +4749,7 @@
             <p:spPr>
               <a:xfrm>
                 <a:off x="2446108" y="4635405"/>
-                <a:ext cx="468013" cy="369332"/>
+                <a:ext cx="340350" cy="338554"/>
               </a:xfrm>
               <a:prstGeom prst="rect">
                 <a:avLst/>
@@ -4772,7 +4772,7 @@
                       <m:sSub>
                         <m:sSubPr>
                           <m:ctrlPr>
-                            <a:rPr lang="fr-FR" sz="2400" b="1" i="1" smtClean="0">
+                            <a:rPr lang="fr-FR" sz="2200" b="1" i="1" smtClean="0">
                               <a:solidFill>
                                 <a:schemeClr val="bg1">
                                   <a:lumMod val="50000"/>
@@ -4784,7 +4784,7 @@
                         </m:sSubPr>
                         <m:e>
                           <m:r>
-                            <a:rPr lang="fr-FR" sz="2400" b="1" i="1" smtClean="0">
+                            <a:rPr lang="fr-FR" sz="2200" b="1" i="1" smtClean="0">
                               <a:solidFill>
                                 <a:schemeClr val="bg1">
                                   <a:lumMod val="50000"/>
@@ -4797,7 +4797,7 @@
                         </m:e>
                         <m:sub>
                           <m:r>
-                            <a:rPr lang="fr-FR" sz="2400" b="1" i="1" smtClean="0">
+                            <a:rPr lang="fr-FR" sz="2200" b="1" i="1" smtClean="0">
                               <a:solidFill>
                                 <a:schemeClr val="bg1">
                                   <a:lumMod val="50000"/>
@@ -4805,14 +4805,14 @@
                               </a:solidFill>
                               <a:latin typeface="Cambria Math" panose="02040503050406030204" pitchFamily="18" charset="0"/>
                             </a:rPr>
-                            <m:t>𝒎</m:t>
+                            <m:t>𝒔</m:t>
                           </m:r>
                         </m:sub>
                       </m:sSub>
                     </m:oMath>
                   </m:oMathPara>
                 </a14:m>
-                <a:endParaRPr lang="fr-FR" sz="2400" b="1" dirty="0">
+                <a:endParaRPr lang="fr-FR" sz="2200" b="1" dirty="0">
                   <a:solidFill>
                     <a:schemeClr val="bg1">
                       <a:lumMod val="50000"/>
@@ -4823,7 +4823,7 @@
             </p:txBody>
           </p:sp>
         </mc:Choice>
-        <mc:Fallback xmlns="">
+        <mc:Fallback>
           <p:sp>
             <p:nvSpPr>
               <p:cNvPr id="64" name="TextBox 63">
@@ -4841,7 +4841,7 @@
             <p:spPr>
               <a:xfrm>
                 <a:off x="2446108" y="4635405"/>
-                <a:ext cx="468013" cy="369332"/>
+                <a:ext cx="340350" cy="338554"/>
               </a:xfrm>
               <a:prstGeom prst="rect">
                 <a:avLst/>
@@ -4849,7 +4849,7 @@
               <a:blipFill>
                 <a:blip r:embed="rId9"/>
                 <a:stretch>
-                  <a:fillRect l="-9091" r="-2597" b="-9836"/>
+                  <a:fillRect l="-12500" r="-3571" b="-8929"/>
                 </a:stretch>
               </a:blipFill>
             </p:spPr>
@@ -4868,14 +4868,14 @@
           </p:sp>
         </mc:Fallback>
       </mc:AlternateContent>
-      <mc:AlternateContent xmlns:mc="http://schemas.openxmlformats.org/markup-compatibility/2006" xmlns:a14="http://schemas.microsoft.com/office/drawing/2010/main">
-        <mc:Choice Requires="a14">
+      <mc:AlternateContent xmlns:mc="http://schemas.openxmlformats.org/markup-compatibility/2006">
+        <mc:Choice xmlns:a14="http://schemas.microsoft.com/office/drawing/2010/main" Requires="a14">
           <p:sp>
             <p:nvSpPr>
-              <p:cNvPr id="65" name="TextBox 64">
+              <p:cNvPr id="66" name="TextBox 65">
                 <a:extLst>
                   <a:ext uri="{FF2B5EF4-FFF2-40B4-BE49-F238E27FC236}">
-                    <a16:creationId xmlns:a16="http://schemas.microsoft.com/office/drawing/2014/main" id="{9C727A7F-0EDF-C7B6-4FD1-3650819AE293}"/>
+                    <a16:creationId xmlns:a16="http://schemas.microsoft.com/office/drawing/2014/main" id="{5C502E12-F790-8D13-969E-228EC2DBB380}"/>
                   </a:ext>
                 </a:extLst>
               </p:cNvPr>
@@ -4884,8 +4884,8 @@
             </p:nvSpPr>
             <p:spPr>
               <a:xfrm>
-                <a:off x="3340376" y="4644380"/>
-                <a:ext cx="394275" cy="369332"/>
+                <a:off x="3465835" y="4671810"/>
+                <a:ext cx="367601" cy="338554"/>
               </a:xfrm>
               <a:prstGeom prst="rect">
                 <a:avLst/>
@@ -4908,7 +4908,7 @@
                       <m:sSub>
                         <m:sSubPr>
                           <m:ctrlPr>
-                            <a:rPr lang="fr-FR" sz="2400" b="1" i="1" smtClean="0">
+                            <a:rPr lang="fr-FR" sz="2200" b="1" i="1" smtClean="0">
                               <a:solidFill>
                                 <a:schemeClr val="bg1">
                                   <a:lumMod val="50000"/>
@@ -4920,7 +4920,7 @@
                         </m:sSubPr>
                         <m:e>
                           <m:r>
-                            <a:rPr lang="fr-FR" sz="2400" b="1" i="1" smtClean="0">
+                            <a:rPr lang="fr-FR" sz="2200" b="1" i="1" smtClean="0">
                               <a:solidFill>
                                 <a:schemeClr val="bg1">
                                   <a:lumMod val="50000"/>
@@ -4933,7 +4933,7 @@
                         </m:e>
                         <m:sub>
                           <m:r>
-                            <a:rPr lang="fr-FR" sz="2400" b="1" i="1" smtClean="0">
+                            <a:rPr lang="fr-FR" sz="2200" b="1" i="1" smtClean="0">
                               <a:solidFill>
                                 <a:schemeClr val="bg1">
                                   <a:lumMod val="50000"/>
@@ -4941,14 +4941,14 @@
                               </a:solidFill>
                               <a:latin typeface="Cambria Math" panose="02040503050406030204" pitchFamily="18" charset="0"/>
                             </a:rPr>
-                            <m:t>𝟏</m:t>
+                            <m:t>𝒉</m:t>
                           </m:r>
                         </m:sub>
                       </m:sSub>
                     </m:oMath>
                   </m:oMathPara>
                 </a14:m>
-                <a:endParaRPr lang="fr-FR" sz="2400" b="1" dirty="0">
+                <a:endParaRPr lang="fr-FR" sz="2200" b="1" dirty="0">
                   <a:solidFill>
                     <a:schemeClr val="bg1">
                       <a:lumMod val="50000"/>
@@ -4959,13 +4959,13 @@
             </p:txBody>
           </p:sp>
         </mc:Choice>
-        <mc:Fallback xmlns="">
+        <mc:Fallback>
           <p:sp>
             <p:nvSpPr>
-              <p:cNvPr id="65" name="TextBox 64">
+              <p:cNvPr id="66" name="TextBox 65">
                 <a:extLst>
                   <a:ext uri="{FF2B5EF4-FFF2-40B4-BE49-F238E27FC236}">
-                    <a16:creationId xmlns:a16="http://schemas.microsoft.com/office/drawing/2014/main" id="{9C727A7F-0EDF-C7B6-4FD1-3650819AE293}"/>
+                    <a16:creationId xmlns:a16="http://schemas.microsoft.com/office/drawing/2014/main" id="{5C502E12-F790-8D13-969E-228EC2DBB380}"/>
                   </a:ext>
                 </a:extLst>
               </p:cNvPr>
@@ -4976,8 +4976,8 @@
             </p:nvSpPr>
             <p:spPr>
               <a:xfrm>
-                <a:off x="3340376" y="4644380"/>
-                <a:ext cx="394275" cy="369332"/>
+                <a:off x="3465835" y="4671810"/>
+                <a:ext cx="367601" cy="338554"/>
               </a:xfrm>
               <a:prstGeom prst="rect">
                 <a:avLst/>
@@ -4985,7 +4985,7 @@
               <a:blipFill>
                 <a:blip r:embed="rId10"/>
                 <a:stretch>
-                  <a:fillRect l="-10769" r="-7692" b="-16667"/>
+                  <a:fillRect l="-11667" r="-8333" b="-16071"/>
                 </a:stretch>
               </a:blipFill>
             </p:spPr>
@@ -5004,144 +5004,8 @@
           </p:sp>
         </mc:Fallback>
       </mc:AlternateContent>
-      <mc:AlternateContent xmlns:mc="http://schemas.openxmlformats.org/markup-compatibility/2006" xmlns:a14="http://schemas.microsoft.com/office/drawing/2010/main">
-        <mc:Choice Requires="a14">
-          <p:sp>
-            <p:nvSpPr>
-              <p:cNvPr id="66" name="TextBox 65">
-                <a:extLst>
-                  <a:ext uri="{FF2B5EF4-FFF2-40B4-BE49-F238E27FC236}">
-                    <a16:creationId xmlns:a16="http://schemas.microsoft.com/office/drawing/2014/main" id="{5C502E12-F790-8D13-969E-228EC2DBB380}"/>
-                  </a:ext>
-                </a:extLst>
-              </p:cNvPr>
-              <p:cNvSpPr txBox="1"/>
-              <p:nvPr/>
-            </p:nvSpPr>
-            <p:spPr>
-              <a:xfrm>
-                <a:off x="3703976" y="4644380"/>
-                <a:ext cx="394275" cy="369332"/>
-              </a:xfrm>
-              <a:prstGeom prst="rect">
-                <a:avLst/>
-              </a:prstGeom>
-              <a:noFill/>
-            </p:spPr>
-            <p:txBody>
-              <a:bodyPr wrap="none" lIns="0" tIns="0" rIns="0" bIns="0" rtlCol="0">
-                <a:spAutoFit/>
-              </a:bodyPr>
-              <a:lstStyle/>
-              <a:p>
-                <a:pPr/>
-                <a14:m>
-                  <m:oMathPara xmlns:m="http://schemas.openxmlformats.org/officeDocument/2006/math">
-                    <m:oMathParaPr>
-                      <m:jc m:val="centerGroup"/>
-                    </m:oMathParaPr>
-                    <m:oMath xmlns:m="http://schemas.openxmlformats.org/officeDocument/2006/math">
-                      <m:sSub>
-                        <m:sSubPr>
-                          <m:ctrlPr>
-                            <a:rPr lang="fr-FR" sz="2400" b="1" i="1" smtClean="0">
-                              <a:solidFill>
-                                <a:schemeClr val="bg1">
-                                  <a:lumMod val="50000"/>
-                                </a:schemeClr>
-                              </a:solidFill>
-                              <a:latin typeface="Cambria Math" panose="02040503050406030204" pitchFamily="18" charset="0"/>
-                            </a:rPr>
-                          </m:ctrlPr>
-                        </m:sSubPr>
-                        <m:e>
-                          <m:r>
-                            <a:rPr lang="fr-FR" sz="2400" b="1" i="1" smtClean="0">
-                              <a:solidFill>
-                                <a:schemeClr val="bg1">
-                                  <a:lumMod val="50000"/>
-                                </a:schemeClr>
-                              </a:solidFill>
-                              <a:latin typeface="Cambria Math" panose="02040503050406030204" pitchFamily="18" charset="0"/>
-                            </a:rPr>
-                            <m:t>𝒙</m:t>
-                          </m:r>
-                        </m:e>
-                        <m:sub>
-                          <m:r>
-                            <a:rPr lang="fr-FR" sz="2400" b="1" i="1" smtClean="0">
-                              <a:solidFill>
-                                <a:schemeClr val="bg1">
-                                  <a:lumMod val="50000"/>
-                                </a:schemeClr>
-                              </a:solidFill>
-                              <a:latin typeface="Cambria Math" panose="02040503050406030204" pitchFamily="18" charset="0"/>
-                            </a:rPr>
-                            <m:t>𝟐</m:t>
-                          </m:r>
-                        </m:sub>
-                      </m:sSub>
-                    </m:oMath>
-                  </m:oMathPara>
-                </a14:m>
-                <a:endParaRPr lang="fr-FR" sz="2400" b="1" dirty="0">
-                  <a:solidFill>
-                    <a:schemeClr val="bg1">
-                      <a:lumMod val="50000"/>
-                    </a:schemeClr>
-                  </a:solidFill>
-                </a:endParaRPr>
-              </a:p>
-            </p:txBody>
-          </p:sp>
-        </mc:Choice>
-        <mc:Fallback xmlns="">
-          <p:sp>
-            <p:nvSpPr>
-              <p:cNvPr id="66" name="TextBox 65">
-                <a:extLst>
-                  <a:ext uri="{FF2B5EF4-FFF2-40B4-BE49-F238E27FC236}">
-                    <a16:creationId xmlns:a16="http://schemas.microsoft.com/office/drawing/2014/main" id="{5C502E12-F790-8D13-969E-228EC2DBB380}"/>
-                  </a:ext>
-                </a:extLst>
-              </p:cNvPr>
-              <p:cNvSpPr txBox="1">
-                <a:spLocks noRot="1" noChangeAspect="1" noMove="1" noResize="1" noEditPoints="1" noAdjustHandles="1" noChangeArrowheads="1" noChangeShapeType="1" noTextEdit="1"/>
-              </p:cNvSpPr>
-              <p:nvPr/>
-            </p:nvSpPr>
-            <p:spPr>
-              <a:xfrm>
-                <a:off x="3703976" y="4644380"/>
-                <a:ext cx="394275" cy="369332"/>
-              </a:xfrm>
-              <a:prstGeom prst="rect">
-                <a:avLst/>
-              </a:prstGeom>
-              <a:blipFill>
-                <a:blip r:embed="rId11"/>
-                <a:stretch>
-                  <a:fillRect l="-10938" r="-9375" b="-16667"/>
-                </a:stretch>
-              </a:blipFill>
-            </p:spPr>
-            <p:txBody>
-              <a:bodyPr/>
-              <a:lstStyle/>
-              <a:p>
-                <a:r>
-                  <a:rPr lang="fr-FR">
-                    <a:noFill/>
-                  </a:rPr>
-                  <a:t> </a:t>
-                </a:r>
-              </a:p>
-            </p:txBody>
-          </p:sp>
-        </mc:Fallback>
-      </mc:AlternateContent>
-      <mc:AlternateContent xmlns:mc="http://schemas.openxmlformats.org/markup-compatibility/2006" xmlns:a14="http://schemas.microsoft.com/office/drawing/2010/main">
-        <mc:Choice Requires="a14">
+      <mc:AlternateContent xmlns:mc="http://schemas.openxmlformats.org/markup-compatibility/2006">
+        <mc:Choice xmlns:a14="http://schemas.microsoft.com/office/drawing/2010/main" Requires="a14">
           <p:sp>
             <p:nvSpPr>
               <p:cNvPr id="67" name="TextBox 66">
@@ -5157,7 +5021,7 @@
             <p:spPr>
               <a:xfrm>
                 <a:off x="1550696" y="4687310"/>
-                <a:ext cx="253274" cy="369332"/>
+                <a:ext cx="232435" cy="338554"/>
               </a:xfrm>
               <a:prstGeom prst="rect">
                 <a:avLst/>
@@ -5178,7 +5042,7 @@
                     </m:oMathParaPr>
                     <m:oMath xmlns:m="http://schemas.openxmlformats.org/officeDocument/2006/math">
                       <m:r>
-                        <a:rPr lang="fr-FR" sz="2400" b="1" i="1" smtClean="0">
+                        <a:rPr lang="fr-FR" sz="2200" b="1" i="1" smtClean="0">
                           <a:solidFill>
                             <a:schemeClr val="bg1">
                               <a:lumMod val="50000"/>
@@ -5191,7 +5055,7 @@
                     </m:oMath>
                   </m:oMathPara>
                 </a14:m>
-                <a:endParaRPr lang="fr-FR" sz="2400" b="1" dirty="0">
+                <a:endParaRPr lang="fr-FR" sz="2200" b="1" dirty="0">
                   <a:solidFill>
                     <a:schemeClr val="bg1">
                       <a:lumMod val="50000"/>
@@ -5202,7 +5066,7 @@
             </p:txBody>
           </p:sp>
         </mc:Choice>
-        <mc:Fallback xmlns="">
+        <mc:Fallback>
           <p:sp>
             <p:nvSpPr>
               <p:cNvPr id="67" name="TextBox 66">
@@ -5220,15 +5084,15 @@
             <p:spPr>
               <a:xfrm>
                 <a:off x="1550696" y="4687310"/>
-                <a:ext cx="253274" cy="369332"/>
+                <a:ext cx="232435" cy="338554"/>
               </a:xfrm>
               <a:prstGeom prst="rect">
                 <a:avLst/>
               </a:prstGeom>
               <a:blipFill>
-                <a:blip r:embed="rId12"/>
+                <a:blip r:embed="rId11"/>
                 <a:stretch>
-                  <a:fillRect l="-26190" r="-28571" b="-4918"/>
+                  <a:fillRect l="-28205" r="-25641" b="-7273"/>
                 </a:stretch>
               </a:blipFill>
             </p:spPr>
@@ -5247,8 +5111,8 @@
           </p:sp>
         </mc:Fallback>
       </mc:AlternateContent>
-      <mc:AlternateContent xmlns:mc="http://schemas.openxmlformats.org/markup-compatibility/2006" xmlns:a14="http://schemas.microsoft.com/office/drawing/2010/main">
-        <mc:Choice Requires="a14">
+      <mc:AlternateContent xmlns:mc="http://schemas.openxmlformats.org/markup-compatibility/2006">
+        <mc:Choice xmlns:a14="http://schemas.microsoft.com/office/drawing/2010/main" Requires="a14">
           <p:sp>
             <p:nvSpPr>
               <p:cNvPr id="68" name="TextBox 67">
@@ -5264,7 +5128,7 @@
             <p:spPr>
               <a:xfrm>
                 <a:off x="9612284" y="4687311"/>
-                <a:ext cx="243656" cy="369332"/>
+                <a:ext cx="224420" cy="338554"/>
               </a:xfrm>
               <a:prstGeom prst="rect">
                 <a:avLst/>
@@ -5285,7 +5149,7 @@
                     </m:oMathParaPr>
                     <m:oMath xmlns:m="http://schemas.openxmlformats.org/officeDocument/2006/math">
                       <m:r>
-                        <a:rPr lang="fr-FR" sz="2400" b="1" i="1" smtClean="0">
+                        <a:rPr lang="fr-FR" sz="2200" b="1" i="1" smtClean="0">
                           <a:solidFill>
                             <a:schemeClr val="bg1">
                               <a:lumMod val="50000"/>
@@ -5298,7 +5162,7 @@
                     </m:oMath>
                   </m:oMathPara>
                 </a14:m>
-                <a:endParaRPr lang="fr-FR" sz="2400" b="1" dirty="0">
+                <a:endParaRPr lang="fr-FR" sz="2200" b="1" dirty="0">
                   <a:solidFill>
                     <a:schemeClr val="bg1">
                       <a:lumMod val="50000"/>
@@ -5309,7 +5173,7 @@
             </p:txBody>
           </p:sp>
         </mc:Choice>
-        <mc:Fallback xmlns="">
+        <mc:Fallback>
           <p:sp>
             <p:nvSpPr>
               <p:cNvPr id="68" name="TextBox 67">
@@ -5327,7 +5191,162 @@
             <p:spPr>
               <a:xfrm>
                 <a:off x="9612284" y="4687311"/>
-                <a:ext cx="243656" cy="369332"/>
+                <a:ext cx="224420" cy="338554"/>
+              </a:xfrm>
+              <a:prstGeom prst="rect">
+                <a:avLst/>
+              </a:prstGeom>
+              <a:blipFill>
+                <a:blip r:embed="rId12"/>
+                <a:stretch>
+                  <a:fillRect l="-29730" r="-27027" b="-7273"/>
+                </a:stretch>
+              </a:blipFill>
+            </p:spPr>
+            <p:txBody>
+              <a:bodyPr/>
+              <a:lstStyle/>
+              <a:p>
+                <a:r>
+                  <a:rPr lang="fr-FR">
+                    <a:noFill/>
+                  </a:rPr>
+                  <a:t> </a:t>
+                </a:r>
+              </a:p>
+            </p:txBody>
+          </p:sp>
+        </mc:Fallback>
+      </mc:AlternateContent>
+      <p:cxnSp>
+        <p:nvCxnSpPr>
+          <p:cNvPr id="2" name="Straight Arrow Connector 1">
+            <a:extLst>
+              <a:ext uri="{FF2B5EF4-FFF2-40B4-BE49-F238E27FC236}">
+                <a16:creationId xmlns:a16="http://schemas.microsoft.com/office/drawing/2014/main" id="{4B8F0F00-1A30-B436-9D98-7976D36166AC}"/>
+              </a:ext>
+            </a:extLst>
+          </p:cNvPr>
+          <p:cNvCxnSpPr>
+            <a:cxnSpLocks/>
+          </p:cNvCxnSpPr>
+          <p:nvPr/>
+        </p:nvCxnSpPr>
+        <p:spPr>
+          <a:xfrm flipH="1">
+            <a:off x="3465835" y="5664425"/>
+            <a:ext cx="359980" cy="0"/>
+          </a:xfrm>
+          <a:prstGeom prst="straightConnector1">
+            <a:avLst/>
+          </a:prstGeom>
+          <a:ln w="19050">
+            <a:solidFill>
+              <a:schemeClr val="bg1">
+                <a:lumMod val="50000"/>
+              </a:schemeClr>
+            </a:solidFill>
+            <a:prstDash val="solid"/>
+            <a:headEnd type="triangle"/>
+            <a:tailEnd type="triangle"/>
+          </a:ln>
+        </p:spPr>
+        <p:style>
+          <a:lnRef idx="1">
+            <a:schemeClr val="accent1"/>
+          </a:lnRef>
+          <a:fillRef idx="0">
+            <a:schemeClr val="accent1"/>
+          </a:fillRef>
+          <a:effectRef idx="0">
+            <a:schemeClr val="accent1"/>
+          </a:effectRef>
+          <a:fontRef idx="minor">
+            <a:schemeClr val="tx1"/>
+          </a:fontRef>
+        </p:style>
+      </p:cxnSp>
+      <mc:AlternateContent xmlns:mc="http://schemas.openxmlformats.org/markup-compatibility/2006">
+        <mc:Choice xmlns:a14="http://schemas.microsoft.com/office/drawing/2010/main" Requires="a14">
+          <p:sp>
+            <p:nvSpPr>
+              <p:cNvPr id="9" name="TextBox 8">
+                <a:extLst>
+                  <a:ext uri="{FF2B5EF4-FFF2-40B4-BE49-F238E27FC236}">
+                    <a16:creationId xmlns:a16="http://schemas.microsoft.com/office/drawing/2014/main" id="{B62CEA8F-2CF1-F1E8-5F95-C7EE6F78EF19}"/>
+                  </a:ext>
+                </a:extLst>
+              </p:cNvPr>
+              <p:cNvSpPr txBox="1"/>
+              <p:nvPr/>
+            </p:nvSpPr>
+            <p:spPr>
+              <a:xfrm>
+                <a:off x="3511974" y="5664425"/>
+                <a:ext cx="246862" cy="338554"/>
+              </a:xfrm>
+              <a:prstGeom prst="rect">
+                <a:avLst/>
+              </a:prstGeom>
+              <a:noFill/>
+            </p:spPr>
+            <p:txBody>
+              <a:bodyPr wrap="none" lIns="0" tIns="0" rIns="0" bIns="0" rtlCol="0">
+                <a:spAutoFit/>
+              </a:bodyPr>
+              <a:lstStyle/>
+              <a:p>
+                <a:pPr/>
+                <a14:m>
+                  <m:oMathPara xmlns:m="http://schemas.openxmlformats.org/officeDocument/2006/math">
+                    <m:oMathParaPr>
+                      <m:jc m:val="centerGroup"/>
+                    </m:oMathParaPr>
+                    <m:oMath xmlns:m="http://schemas.openxmlformats.org/officeDocument/2006/math">
+                      <m:r>
+                        <a:rPr lang="fr-FR" sz="2200" b="1" i="0" smtClean="0">
+                          <a:solidFill>
+                            <a:schemeClr val="bg1">
+                              <a:lumMod val="50000"/>
+                            </a:schemeClr>
+                          </a:solidFill>
+                          <a:latin typeface="Cambria Math" panose="02040503050406030204" pitchFamily="18" charset="0"/>
+                        </a:rPr>
+                        <m:t>𝚫</m:t>
+                      </m:r>
+                    </m:oMath>
+                  </m:oMathPara>
+                </a14:m>
+                <a:endParaRPr lang="fr-FR" sz="2200" b="1" dirty="0">
+                  <a:solidFill>
+                    <a:schemeClr val="bg1">
+                      <a:lumMod val="50000"/>
+                    </a:schemeClr>
+                  </a:solidFill>
+                </a:endParaRPr>
+              </a:p>
+            </p:txBody>
+          </p:sp>
+        </mc:Choice>
+        <mc:Fallback>
+          <p:sp>
+            <p:nvSpPr>
+              <p:cNvPr id="9" name="TextBox 8">
+                <a:extLst>
+                  <a:ext uri="{FF2B5EF4-FFF2-40B4-BE49-F238E27FC236}">
+                    <a16:creationId xmlns:a16="http://schemas.microsoft.com/office/drawing/2014/main" id="{B62CEA8F-2CF1-F1E8-5F95-C7EE6F78EF19}"/>
+                  </a:ext>
+                </a:extLst>
+              </p:cNvPr>
+              <p:cNvSpPr txBox="1">
+                <a:spLocks noRot="1" noChangeAspect="1" noMove="1" noResize="1" noEditPoints="1" noAdjustHandles="1" noChangeArrowheads="1" noChangeShapeType="1" noTextEdit="1"/>
+              </p:cNvSpPr>
+              <p:nvPr/>
+            </p:nvSpPr>
+            <p:spPr>
+              <a:xfrm>
+                <a:off x="3511974" y="5664425"/>
+                <a:ext cx="246862" cy="338554"/>
               </a:xfrm>
               <a:prstGeom prst="rect">
                 <a:avLst/>
@@ -5335,7 +5354,7 @@
               <a:blipFill>
                 <a:blip r:embed="rId13"/>
                 <a:stretch>
-                  <a:fillRect l="-30000" r="-27500" b="-4918"/>
+                  <a:fillRect l="-26829" r="-24390" b="-5357"/>
                 </a:stretch>
               </a:blipFill>
             </p:spPr>
@@ -5500,8 +5519,8 @@
             </a:fontRef>
           </p:style>
         </p:cxnSp>
-        <mc:AlternateContent xmlns:mc="http://schemas.openxmlformats.org/markup-compatibility/2006">
-          <mc:Choice xmlns:a14="http://schemas.microsoft.com/office/drawing/2010/main" Requires="a14">
+        <mc:AlternateContent xmlns:mc="http://schemas.openxmlformats.org/markup-compatibility/2006" xmlns:a14="http://schemas.microsoft.com/office/drawing/2010/main">
+          <mc:Choice Requires="a14">
             <p:sp>
               <p:nvSpPr>
                 <p:cNvPr id="11" name="TextBox 10">
@@ -5558,7 +5577,7 @@
               </p:txBody>
             </p:sp>
           </mc:Choice>
-          <mc:Fallback>
+          <mc:Fallback xmlns="">
             <p:sp>
               <p:nvSpPr>
                 <p:cNvPr id="11" name="TextBox 10">
@@ -5603,8 +5622,8 @@
             </p:sp>
           </mc:Fallback>
         </mc:AlternateContent>
-        <mc:AlternateContent xmlns:mc="http://schemas.openxmlformats.org/markup-compatibility/2006">
-          <mc:Choice xmlns:a14="http://schemas.microsoft.com/office/drawing/2010/main" Requires="a14">
+        <mc:AlternateContent xmlns:mc="http://schemas.openxmlformats.org/markup-compatibility/2006" xmlns:a14="http://schemas.microsoft.com/office/drawing/2010/main">
+          <mc:Choice Requires="a14">
             <p:sp>
               <p:nvSpPr>
                 <p:cNvPr id="12" name="TextBox 11">
@@ -5661,7 +5680,7 @@
               </p:txBody>
             </p:sp>
           </mc:Choice>
-          <mc:Fallback>
+          <mc:Fallback xmlns="">
             <p:sp>
               <p:nvSpPr>
                 <p:cNvPr id="12" name="TextBox 11">
@@ -6414,8 +6433,8 @@
             </a:fontRef>
           </p:style>
         </p:cxnSp>
-        <mc:AlternateContent xmlns:mc="http://schemas.openxmlformats.org/markup-compatibility/2006">
-          <mc:Choice xmlns:a14="http://schemas.microsoft.com/office/drawing/2010/main" Requires="a14">
+        <mc:AlternateContent xmlns:mc="http://schemas.openxmlformats.org/markup-compatibility/2006" xmlns:a14="http://schemas.microsoft.com/office/drawing/2010/main">
+          <mc:Choice Requires="a14">
             <p:sp>
               <p:nvSpPr>
                 <p:cNvPr id="60" name="TextBox 59">
@@ -6505,7 +6524,7 @@
               </p:txBody>
             </p:sp>
           </mc:Choice>
-          <mc:Fallback>
+          <mc:Fallback xmlns="">
             <p:sp>
               <p:nvSpPr>
                 <p:cNvPr id="60" name="TextBox 59">
@@ -6550,8 +6569,8 @@
             </p:sp>
           </mc:Fallback>
         </mc:AlternateContent>
-        <mc:AlternateContent xmlns:mc="http://schemas.openxmlformats.org/markup-compatibility/2006">
-          <mc:Choice xmlns:a14="http://schemas.microsoft.com/office/drawing/2010/main" Requires="a14">
+        <mc:AlternateContent xmlns:mc="http://schemas.openxmlformats.org/markup-compatibility/2006" xmlns:a14="http://schemas.microsoft.com/office/drawing/2010/main">
+          <mc:Choice Requires="a14">
             <p:sp>
               <p:nvSpPr>
                 <p:cNvPr id="61" name="TextBox 60">
@@ -6641,7 +6660,7 @@
               </p:txBody>
             </p:sp>
           </mc:Choice>
-          <mc:Fallback>
+          <mc:Fallback xmlns="">
             <p:sp>
               <p:nvSpPr>
                 <p:cNvPr id="61" name="TextBox 60">
@@ -6686,8 +6705,8 @@
             </p:sp>
           </mc:Fallback>
         </mc:AlternateContent>
-        <mc:AlternateContent xmlns:mc="http://schemas.openxmlformats.org/markup-compatibility/2006">
-          <mc:Choice xmlns:a14="http://schemas.microsoft.com/office/drawing/2010/main" Requires="a14">
+        <mc:AlternateContent xmlns:mc="http://schemas.openxmlformats.org/markup-compatibility/2006" xmlns:a14="http://schemas.microsoft.com/office/drawing/2010/main">
+          <mc:Choice Requires="a14">
             <p:sp>
               <p:nvSpPr>
                 <p:cNvPr id="67" name="TextBox 66">
@@ -6748,7 +6767,7 @@
               </p:txBody>
             </p:sp>
           </mc:Choice>
-          <mc:Fallback>
+          <mc:Fallback xmlns="">
             <p:sp>
               <p:nvSpPr>
                 <p:cNvPr id="67" name="TextBox 66">
@@ -6793,8 +6812,8 @@
             </p:sp>
           </mc:Fallback>
         </mc:AlternateContent>
-        <mc:AlternateContent xmlns:mc="http://schemas.openxmlformats.org/markup-compatibility/2006">
-          <mc:Choice xmlns:a14="http://schemas.microsoft.com/office/drawing/2010/main" Requires="a14">
+        <mc:AlternateContent xmlns:mc="http://schemas.openxmlformats.org/markup-compatibility/2006" xmlns:a14="http://schemas.microsoft.com/office/drawing/2010/main">
+          <mc:Choice Requires="a14">
             <p:sp>
               <p:nvSpPr>
                 <p:cNvPr id="68" name="TextBox 67">
@@ -6855,7 +6874,7 @@
               </p:txBody>
             </p:sp>
           </mc:Choice>
-          <mc:Fallback>
+          <mc:Fallback xmlns="">
             <p:sp>
               <p:nvSpPr>
                 <p:cNvPr id="68" name="TextBox 67">
